--- a/Data Mining and Analytics -21CSE355T/Unit-5/PPT/6_DataMining_IntrusionDetection.pptx
+++ b/Data Mining and Analytics -21CSE355T/Unit-5/PPT/6_DataMining_IntrusionDetection.pptx
@@ -68,29 +68,57 @@
             <a:noAutofit/>
           </a:bodyPr>
           <a:p>
+            <a:pPr algn="ctr"/>
             <a:r>
-              <a:rPr b="0" lang="en-US" sz="1800" spc="-1" strike="noStrike">
+              <a:rPr b="0" lang="en-US" sz="4400" spc="-1" strike="noStrike">
                 <a:solidFill>
-                  <a:schemeClr val="dk1"/>
+                  <a:srgbClr val="000000"/>
                 </a:solidFill>
-                <a:latin typeface="Calibri"/>
+                <a:latin typeface="Arial"/>
               </a:rPr>
-              <a:t>Click to move </a:t>
+              <a:t>Click </a:t>
             </a:r>
             <a:r>
-              <a:rPr b="0" lang="en-US" sz="1800" spc="-1" strike="noStrike">
+              <a:rPr b="0" lang="en-US" sz="4400" spc="-1" strike="noStrike">
                 <a:solidFill>
-                  <a:schemeClr val="dk1"/>
+                  <a:srgbClr val="000000"/>
                 </a:solidFill>
-                <a:latin typeface="Calibri"/>
+                <a:latin typeface="Arial"/>
               </a:rPr>
-              <a:t>the slide</a:t>
+              <a:t>to </a:t>
             </a:r>
-            <a:endParaRPr b="0" lang="en-US" sz="1800" spc="-1" strike="noStrike">
-              <a:solidFill>
-                <a:schemeClr val="dk1"/>
-              </a:solidFill>
-              <a:latin typeface="Calibri"/>
+            <a:r>
+              <a:rPr b="0" lang="en-US" sz="4400" spc="-1" strike="noStrike">
+                <a:solidFill>
+                  <a:srgbClr val="000000"/>
+                </a:solidFill>
+                <a:latin typeface="Arial"/>
+              </a:rPr>
+              <a:t>mov</a:t>
+            </a:r>
+            <a:r>
+              <a:rPr b="0" lang="en-US" sz="4400" spc="-1" strike="noStrike">
+                <a:solidFill>
+                  <a:srgbClr val="000000"/>
+                </a:solidFill>
+                <a:latin typeface="Arial"/>
+              </a:rPr>
+              <a:t>e the </a:t>
+            </a:r>
+            <a:r>
+              <a:rPr b="0" lang="en-US" sz="4400" spc="-1" strike="noStrike">
+                <a:solidFill>
+                  <a:srgbClr val="000000"/>
+                </a:solidFill>
+                <a:latin typeface="Arial"/>
+              </a:rPr>
+              <a:t>slide</a:t>
+            </a:r>
+            <a:endParaRPr b="0" lang="en-US" sz="4400" spc="-1" strike="noStrike">
+              <a:solidFill>
+                <a:srgbClr val="000000"/>
+              </a:solidFill>
+              <a:latin typeface="Arial"/>
             </a:endParaRPr>
           </a:p>
         </p:txBody>
@@ -133,7 +161,7 @@
                 </a:solidFill>
                 <a:latin typeface="Arial"/>
               </a:rPr>
-              <a:t>Click to edit the </a:t>
+              <a:t>Click to </a:t>
             </a:r>
             <a:r>
               <a:rPr b="0" lang="en-US" sz="2000" spc="-1" strike="noStrike">
@@ -142,7 +170,34 @@
                 </a:solidFill>
                 <a:latin typeface="Arial"/>
               </a:rPr>
-              <a:t>notes format</a:t>
+              <a:t>edit </a:t>
+            </a:r>
+            <a:r>
+              <a:rPr b="0" lang="en-US" sz="2000" spc="-1" strike="noStrike">
+                <a:solidFill>
+                  <a:srgbClr val="000000"/>
+                </a:solidFill>
+                <a:latin typeface="Arial"/>
+              </a:rPr>
+              <a:t>the </a:t>
+            </a:r>
+            <a:r>
+              <a:rPr b="0" lang="en-US" sz="2000" spc="-1" strike="noStrike">
+                <a:solidFill>
+                  <a:srgbClr val="000000"/>
+                </a:solidFill>
+                <a:latin typeface="Arial"/>
+              </a:rPr>
+              <a:t>notes </a:t>
+            </a:r>
+            <a:r>
+              <a:rPr b="0" lang="en-US" sz="2000" spc="-1" strike="noStrike">
+                <a:solidFill>
+                  <a:srgbClr val="000000"/>
+                </a:solidFill>
+                <a:latin typeface="Arial"/>
+              </a:rPr>
+              <a:t>format</a:t>
             </a:r>
             <a:endParaRPr b="0" lang="en-US" sz="2000" spc="-1" strike="noStrike">
               <a:solidFill>
@@ -364,7 +419,7 @@
             <a:pPr indent="0" algn="r">
               <a:buNone/>
             </a:pPr>
-            <a:fld id="{937D504B-7BAA-4492-94A8-52DA19A9C123}" type="slidenum">
+            <a:fld id="{E2C0DB03-0CFD-45F9-BD48-AA848A292314}" type="slidenum">
               <a:rPr b="0" lang="en-US" sz="1400" spc="-1" strike="noStrike">
                 <a:solidFill>
                   <a:srgbClr val="000000"/>
@@ -418,7 +473,7 @@
         <p:spPr>
           <a:xfrm>
             <a:off x="685800" y="1143000"/>
-            <a:ext cx="5486040" cy="3085920"/>
+            <a:ext cx="5485680" cy="3085560"/>
           </a:xfrm>
           <a:prstGeom prst="rect">
             <a:avLst/>
@@ -441,7 +496,7 @@
         <p:spPr>
           <a:xfrm>
             <a:off x="685800" y="4400640"/>
-            <a:ext cx="5486040" cy="3600000"/>
+            <a:ext cx="5485680" cy="3599640"/>
           </a:xfrm>
           <a:prstGeom prst="rect">
             <a:avLst/>
@@ -481,7 +536,7 @@
         <p:spPr>
           <a:xfrm>
             <a:off x="3884760" y="8685360"/>
-            <a:ext cx="2971440" cy="458280"/>
+            <a:ext cx="2971080" cy="457920"/>
           </a:xfrm>
           <a:prstGeom prst="rect">
             <a:avLst/>
@@ -501,6 +556,9 @@
                 <a:spcPct val="100000"/>
               </a:lnSpc>
               <a:buNone/>
+              <a:tabLst>
+                <a:tab algn="l" pos="0"/>
+              </a:tabLst>
               <a:defRPr b="0" lang="en-US" sz="1200" spc="-1" strike="noStrike">
                 <a:solidFill>
                   <a:schemeClr val="dk1"/>
@@ -516,8 +574,11 @@
                 <a:spcPct val="100000"/>
               </a:lnSpc>
               <a:buNone/>
-            </a:pPr>
-            <a:fld id="{29B37FF4-4337-495B-86B1-8469970D8794}" type="slidenum">
+              <a:tabLst>
+                <a:tab algn="l" pos="0"/>
+              </a:tabLst>
+            </a:pPr>
+            <a:fld id="{5C743865-8ED4-4618-B623-B290B10B1762}" type="slidenum">
               <a:rPr b="0" lang="en-US" sz="1200" spc="-1" strike="noStrike">
                 <a:solidFill>
                   <a:schemeClr val="dk1"/>
@@ -571,7 +632,7 @@
         <p:spPr>
           <a:xfrm>
             <a:off x="685800" y="1143000"/>
-            <a:ext cx="5486040" cy="3085920"/>
+            <a:ext cx="5485680" cy="3085560"/>
           </a:xfrm>
           <a:prstGeom prst="rect">
             <a:avLst/>
@@ -594,7 +655,7 @@
         <p:spPr>
           <a:xfrm>
             <a:off x="685800" y="4400640"/>
-            <a:ext cx="5486040" cy="3600000"/>
+            <a:ext cx="5485680" cy="3599640"/>
           </a:xfrm>
           <a:prstGeom prst="rect">
             <a:avLst/>
@@ -634,7 +695,7 @@
         <p:spPr>
           <a:xfrm>
             <a:off x="3884760" y="8685360"/>
-            <a:ext cx="2971440" cy="458280"/>
+            <a:ext cx="2971080" cy="457920"/>
           </a:xfrm>
           <a:prstGeom prst="rect">
             <a:avLst/>
@@ -654,6 +715,9 @@
                 <a:spcPct val="100000"/>
               </a:lnSpc>
               <a:buNone/>
+              <a:tabLst>
+                <a:tab algn="l" pos="0"/>
+              </a:tabLst>
               <a:defRPr b="0" lang="en-US" sz="1200" spc="-1" strike="noStrike">
                 <a:solidFill>
                   <a:schemeClr val="dk1"/>
@@ -669,8 +733,11 @@
                 <a:spcPct val="100000"/>
               </a:lnSpc>
               <a:buNone/>
-            </a:pPr>
-            <a:fld id="{F70EA7C1-E42B-4CD1-8503-2E9C737A47DE}" type="slidenum">
+              <a:tabLst>
+                <a:tab algn="l" pos="0"/>
+              </a:tabLst>
+            </a:pPr>
+            <a:fld id="{254A4336-CE57-4F61-BEAC-FE0770E75AAB}" type="slidenum">
               <a:rPr b="0" lang="en-US" sz="1200" spc="-1" strike="noStrike">
                 <a:solidFill>
                   <a:schemeClr val="dk1"/>
@@ -724,7 +791,7 @@
         <p:spPr>
           <a:xfrm>
             <a:off x="685800" y="1143000"/>
-            <a:ext cx="5486040" cy="3085920"/>
+            <a:ext cx="5485680" cy="3085560"/>
           </a:xfrm>
           <a:prstGeom prst="rect">
             <a:avLst/>
@@ -747,7 +814,7 @@
         <p:spPr>
           <a:xfrm>
             <a:off x="685800" y="4400640"/>
-            <a:ext cx="5486040" cy="3600000"/>
+            <a:ext cx="5485680" cy="3599640"/>
           </a:xfrm>
           <a:prstGeom prst="rect">
             <a:avLst/>
@@ -787,7 +854,7 @@
         <p:spPr>
           <a:xfrm>
             <a:off x="3884760" y="8685360"/>
-            <a:ext cx="2971440" cy="458280"/>
+            <a:ext cx="2971080" cy="457920"/>
           </a:xfrm>
           <a:prstGeom prst="rect">
             <a:avLst/>
@@ -807,6 +874,9 @@
                 <a:spcPct val="100000"/>
               </a:lnSpc>
               <a:buNone/>
+              <a:tabLst>
+                <a:tab algn="l" pos="0"/>
+              </a:tabLst>
               <a:defRPr b="0" lang="en-US" sz="1200" spc="-1" strike="noStrike">
                 <a:solidFill>
                   <a:schemeClr val="dk1"/>
@@ -822,8 +892,11 @@
                 <a:spcPct val="100000"/>
               </a:lnSpc>
               <a:buNone/>
-            </a:pPr>
-            <a:fld id="{17430955-1F22-450D-BB47-CC684048B89C}" type="slidenum">
+              <a:tabLst>
+                <a:tab algn="l" pos="0"/>
+              </a:tabLst>
+            </a:pPr>
+            <a:fld id="{24C68924-CACD-45E0-AC9E-E34F55D5FF13}" type="slidenum">
               <a:rPr b="0" lang="en-US" sz="1200" spc="-1" strike="noStrike">
                 <a:solidFill>
                   <a:schemeClr val="dk1"/>
@@ -877,7 +950,7 @@
         <p:spPr>
           <a:xfrm>
             <a:off x="685800" y="1143000"/>
-            <a:ext cx="5486040" cy="3085920"/>
+            <a:ext cx="5485680" cy="3085560"/>
           </a:xfrm>
           <a:prstGeom prst="rect">
             <a:avLst/>
@@ -900,7 +973,7 @@
         <p:spPr>
           <a:xfrm>
             <a:off x="685800" y="4400640"/>
-            <a:ext cx="5486040" cy="3600000"/>
+            <a:ext cx="5485680" cy="3599640"/>
           </a:xfrm>
           <a:prstGeom prst="rect">
             <a:avLst/>
@@ -940,7 +1013,7 @@
         <p:spPr>
           <a:xfrm>
             <a:off x="3884760" y="8685360"/>
-            <a:ext cx="2971440" cy="458280"/>
+            <a:ext cx="2971080" cy="457920"/>
           </a:xfrm>
           <a:prstGeom prst="rect">
             <a:avLst/>
@@ -960,6 +1033,9 @@
                 <a:spcPct val="100000"/>
               </a:lnSpc>
               <a:buNone/>
+              <a:tabLst>
+                <a:tab algn="l" pos="0"/>
+              </a:tabLst>
               <a:defRPr b="0" lang="en-US" sz="1200" spc="-1" strike="noStrike">
                 <a:solidFill>
                   <a:schemeClr val="dk1"/>
@@ -975,8 +1051,11 @@
                 <a:spcPct val="100000"/>
               </a:lnSpc>
               <a:buNone/>
-            </a:pPr>
-            <a:fld id="{EDDE063C-D002-4C85-89F5-88FE3F726DC4}" type="slidenum">
+              <a:tabLst>
+                <a:tab algn="l" pos="0"/>
+              </a:tabLst>
+            </a:pPr>
+            <a:fld id="{AE8D2330-AB81-456E-BEED-43A48CA2F36B}" type="slidenum">
               <a:rPr b="0" lang="en-US" sz="1200" spc="-1" strike="noStrike">
                 <a:solidFill>
                   <a:schemeClr val="dk1"/>
@@ -1030,7 +1109,7 @@
         <p:spPr>
           <a:xfrm>
             <a:off x="685800" y="1143000"/>
-            <a:ext cx="5486040" cy="3085920"/>
+            <a:ext cx="5485680" cy="3085560"/>
           </a:xfrm>
           <a:prstGeom prst="rect">
             <a:avLst/>
@@ -1053,7 +1132,7 @@
         <p:spPr>
           <a:xfrm>
             <a:off x="685800" y="4400640"/>
-            <a:ext cx="5486040" cy="3600000"/>
+            <a:ext cx="5485680" cy="3599640"/>
           </a:xfrm>
           <a:prstGeom prst="rect">
             <a:avLst/>
@@ -1093,7 +1172,7 @@
         <p:spPr>
           <a:xfrm>
             <a:off x="3884760" y="8685360"/>
-            <a:ext cx="2971440" cy="458280"/>
+            <a:ext cx="2971080" cy="457920"/>
           </a:xfrm>
           <a:prstGeom prst="rect">
             <a:avLst/>
@@ -1113,6 +1192,9 @@
                 <a:spcPct val="100000"/>
               </a:lnSpc>
               <a:buNone/>
+              <a:tabLst>
+                <a:tab algn="l" pos="0"/>
+              </a:tabLst>
               <a:defRPr b="0" lang="en-US" sz="1200" spc="-1" strike="noStrike">
                 <a:solidFill>
                   <a:schemeClr val="dk1"/>
@@ -1128,8 +1210,11 @@
                 <a:spcPct val="100000"/>
               </a:lnSpc>
               <a:buNone/>
-            </a:pPr>
-            <a:fld id="{9380CE4F-A6F4-41E0-B070-730CE75E320D}" type="slidenum">
+              <a:tabLst>
+                <a:tab algn="l" pos="0"/>
+              </a:tabLst>
+            </a:pPr>
+            <a:fld id="{9C9936BF-C222-4D50-AF55-7C45F59A7738}" type="slidenum">
               <a:rPr b="0" lang="en-US" sz="1200" spc="-1" strike="noStrike">
                 <a:solidFill>
                   <a:schemeClr val="dk1"/>
@@ -1183,7 +1268,7 @@
         <p:spPr>
           <a:xfrm>
             <a:off x="685800" y="1143000"/>
-            <a:ext cx="5486040" cy="3085920"/>
+            <a:ext cx="5485680" cy="3085560"/>
           </a:xfrm>
           <a:prstGeom prst="rect">
             <a:avLst/>
@@ -1206,7 +1291,7 @@
         <p:spPr>
           <a:xfrm>
             <a:off x="685800" y="4400640"/>
-            <a:ext cx="5486040" cy="3600000"/>
+            <a:ext cx="5485680" cy="3599640"/>
           </a:xfrm>
           <a:prstGeom prst="rect">
             <a:avLst/>
@@ -1246,7 +1331,7 @@
         <p:spPr>
           <a:xfrm>
             <a:off x="3884760" y="8685360"/>
-            <a:ext cx="2971440" cy="458280"/>
+            <a:ext cx="2971080" cy="457920"/>
           </a:xfrm>
           <a:prstGeom prst="rect">
             <a:avLst/>
@@ -1266,6 +1351,9 @@
                 <a:spcPct val="100000"/>
               </a:lnSpc>
               <a:buNone/>
+              <a:tabLst>
+                <a:tab algn="l" pos="0"/>
+              </a:tabLst>
               <a:defRPr b="0" lang="en-US" sz="1200" spc="-1" strike="noStrike">
                 <a:solidFill>
                   <a:schemeClr val="dk1"/>
@@ -1281,8 +1369,11 @@
                 <a:spcPct val="100000"/>
               </a:lnSpc>
               <a:buNone/>
-            </a:pPr>
-            <a:fld id="{1F7C7EC3-54B8-4772-B684-BC06F46FFAF0}" type="slidenum">
+              <a:tabLst>
+                <a:tab algn="l" pos="0"/>
+              </a:tabLst>
+            </a:pPr>
+            <a:fld id="{1E9214D8-2712-4FD1-BD81-00B3D4493E27}" type="slidenum">
               <a:rPr b="0" lang="en-US" sz="1200" spc="-1" strike="noStrike">
                 <a:solidFill>
                   <a:schemeClr val="dk1"/>
@@ -1336,7 +1427,7 @@
         <p:spPr>
           <a:xfrm>
             <a:off x="685800" y="1143000"/>
-            <a:ext cx="5486040" cy="3085920"/>
+            <a:ext cx="5485680" cy="3085560"/>
           </a:xfrm>
           <a:prstGeom prst="rect">
             <a:avLst/>
@@ -1359,7 +1450,7 @@
         <p:spPr>
           <a:xfrm>
             <a:off x="685800" y="4400640"/>
-            <a:ext cx="5486040" cy="3600000"/>
+            <a:ext cx="5485680" cy="3599640"/>
           </a:xfrm>
           <a:prstGeom prst="rect">
             <a:avLst/>
@@ -1399,7 +1490,7 @@
         <p:spPr>
           <a:xfrm>
             <a:off x="3884760" y="8685360"/>
-            <a:ext cx="2971440" cy="458280"/>
+            <a:ext cx="2971080" cy="457920"/>
           </a:xfrm>
           <a:prstGeom prst="rect">
             <a:avLst/>
@@ -1419,6 +1510,9 @@
                 <a:spcPct val="100000"/>
               </a:lnSpc>
               <a:buNone/>
+              <a:tabLst>
+                <a:tab algn="l" pos="0"/>
+              </a:tabLst>
               <a:defRPr b="0" lang="en-US" sz="1200" spc="-1" strike="noStrike">
                 <a:solidFill>
                   <a:schemeClr val="dk1"/>
@@ -1434,8 +1528,11 @@
                 <a:spcPct val="100000"/>
               </a:lnSpc>
               <a:buNone/>
-            </a:pPr>
-            <a:fld id="{5534F468-4305-4D61-8A76-FB401EDE7379}" type="slidenum">
+              <a:tabLst>
+                <a:tab algn="l" pos="0"/>
+              </a:tabLst>
+            </a:pPr>
+            <a:fld id="{60671F66-6305-422A-BC18-3F240E60D774}" type="slidenum">
               <a:rPr b="0" lang="en-US" sz="1200" spc="-1" strike="noStrike">
                 <a:solidFill>
                   <a:schemeClr val="dk1"/>
@@ -1489,7 +1586,7 @@
         <p:spPr>
           <a:xfrm>
             <a:off x="685800" y="1143000"/>
-            <a:ext cx="5486040" cy="3085920"/>
+            <a:ext cx="5485680" cy="3085560"/>
           </a:xfrm>
           <a:prstGeom prst="rect">
             <a:avLst/>
@@ -1512,7 +1609,7 @@
         <p:spPr>
           <a:xfrm>
             <a:off x="685800" y="4400640"/>
-            <a:ext cx="5486040" cy="3600000"/>
+            <a:ext cx="5485680" cy="3599640"/>
           </a:xfrm>
           <a:prstGeom prst="rect">
             <a:avLst/>
@@ -1552,7 +1649,7 @@
         <p:spPr>
           <a:xfrm>
             <a:off x="3884760" y="8685360"/>
-            <a:ext cx="2971440" cy="458280"/>
+            <a:ext cx="2971080" cy="457920"/>
           </a:xfrm>
           <a:prstGeom prst="rect">
             <a:avLst/>
@@ -1572,6 +1669,9 @@
                 <a:spcPct val="100000"/>
               </a:lnSpc>
               <a:buNone/>
+              <a:tabLst>
+                <a:tab algn="l" pos="0"/>
+              </a:tabLst>
               <a:defRPr b="0" lang="en-US" sz="1200" spc="-1" strike="noStrike">
                 <a:solidFill>
                   <a:schemeClr val="dk1"/>
@@ -1587,8 +1687,11 @@
                 <a:spcPct val="100000"/>
               </a:lnSpc>
               <a:buNone/>
-            </a:pPr>
-            <a:fld id="{0BEFC54E-4B39-48B7-93AB-C4B9907EA832}" type="slidenum">
+              <a:tabLst>
+                <a:tab algn="l" pos="0"/>
+              </a:tabLst>
+            </a:pPr>
+            <a:fld id="{7D09F7D3-7B09-4F75-9C8D-EFAAD5F90AD0}" type="slidenum">
               <a:rPr b="0" lang="en-US" sz="1200" spc="-1" strike="noStrike">
                 <a:solidFill>
                   <a:schemeClr val="dk1"/>
@@ -1642,7 +1745,7 @@
         <p:spPr>
           <a:xfrm>
             <a:off x="685800" y="1143000"/>
-            <a:ext cx="5486040" cy="3085920"/>
+            <a:ext cx="5485680" cy="3085560"/>
           </a:xfrm>
           <a:prstGeom prst="rect">
             <a:avLst/>
@@ -1665,7 +1768,7 @@
         <p:spPr>
           <a:xfrm>
             <a:off x="685800" y="4400640"/>
-            <a:ext cx="5486040" cy="3600000"/>
+            <a:ext cx="5485680" cy="3599640"/>
           </a:xfrm>
           <a:prstGeom prst="rect">
             <a:avLst/>
@@ -1705,7 +1808,7 @@
         <p:spPr>
           <a:xfrm>
             <a:off x="3884760" y="8685360"/>
-            <a:ext cx="2971440" cy="458280"/>
+            <a:ext cx="2971080" cy="457920"/>
           </a:xfrm>
           <a:prstGeom prst="rect">
             <a:avLst/>
@@ -1725,6 +1828,9 @@
                 <a:spcPct val="100000"/>
               </a:lnSpc>
               <a:buNone/>
+              <a:tabLst>
+                <a:tab algn="l" pos="0"/>
+              </a:tabLst>
               <a:defRPr b="0" lang="en-US" sz="1200" spc="-1" strike="noStrike">
                 <a:solidFill>
                   <a:schemeClr val="dk1"/>
@@ -1740,8 +1846,11 @@
                 <a:spcPct val="100000"/>
               </a:lnSpc>
               <a:buNone/>
-            </a:pPr>
-            <a:fld id="{CF223C9D-A48A-4BB1-9C0B-F3FAE4FC8472}" type="slidenum">
+              <a:tabLst>
+                <a:tab algn="l" pos="0"/>
+              </a:tabLst>
+            </a:pPr>
+            <a:fld id="{74F0CA0B-1138-49B4-BF57-E3B27F5C3806}" type="slidenum">
               <a:rPr b="0" lang="en-US" sz="1200" spc="-1" strike="noStrike">
                 <a:solidFill>
                   <a:schemeClr val="dk1"/>
@@ -1839,32 +1948,86 @@
             <a:noAutofit/>
           </a:bodyPr>
           <a:p>
-            <a:pPr indent="0">
+            <a:pPr indent="0" algn="ctr">
               <a:buNone/>
             </a:pPr>
             <a:r>
-              <a:rPr b="0" lang="en-US" sz="1800" spc="-1" strike="noStrike">
+              <a:rPr b="0" lang="en-US" sz="4400" spc="-1" strike="noStrike">
                 <a:solidFill>
-                  <a:schemeClr val="dk1"/>
+                  <a:srgbClr val="000000"/>
                 </a:solidFill>
-                <a:latin typeface="Calibri"/>
+                <a:latin typeface="Arial"/>
               </a:rPr>
-              <a:t>Click to edit the </a:t>
+              <a:t>Click </a:t>
             </a:r>
             <a:r>
-              <a:rPr b="0" lang="en-US" sz="1800" spc="-1" strike="noStrike">
+              <a:rPr b="0" lang="en-US" sz="4400" spc="-1" strike="noStrike">
                 <a:solidFill>
-                  <a:schemeClr val="dk1"/>
+                  <a:srgbClr val="000000"/>
                 </a:solidFill>
-                <a:latin typeface="Calibri"/>
+                <a:latin typeface="Arial"/>
               </a:rPr>
-              <a:t>title text format</a:t>
+              <a:t>to </a:t>
             </a:r>
-            <a:endParaRPr b="0" lang="en-US" sz="1800" spc="-1" strike="noStrike">
-              <a:solidFill>
-                <a:schemeClr val="dk1"/>
-              </a:solidFill>
-              <a:latin typeface="Calibri"/>
+            <a:r>
+              <a:rPr b="0" lang="en-US" sz="4400" spc="-1" strike="noStrike">
+                <a:solidFill>
+                  <a:srgbClr val="000000"/>
+                </a:solidFill>
+                <a:latin typeface="Arial"/>
+              </a:rPr>
+              <a:t>edit </a:t>
+            </a:r>
+            <a:r>
+              <a:rPr b="0" lang="en-US" sz="4400" spc="-1" strike="noStrike">
+                <a:solidFill>
+                  <a:srgbClr val="000000"/>
+                </a:solidFill>
+                <a:latin typeface="Arial"/>
+              </a:rPr>
+              <a:t>the </a:t>
+            </a:r>
+            <a:r>
+              <a:rPr b="0" lang="en-US" sz="4400" spc="-1" strike="noStrike">
+                <a:solidFill>
+                  <a:srgbClr val="000000"/>
+                </a:solidFill>
+                <a:latin typeface="Arial"/>
+              </a:rPr>
+              <a:t>title </a:t>
+            </a:r>
+            <a:r>
+              <a:rPr b="0" lang="en-US" sz="4400" spc="-1" strike="noStrike">
+                <a:solidFill>
+                  <a:srgbClr val="000000"/>
+                </a:solidFill>
+                <a:latin typeface="Arial"/>
+              </a:rPr>
+              <a:t>text </a:t>
+            </a:r>
+            <a:r>
+              <a:rPr b="0" lang="en-US" sz="4400" spc="-1" strike="noStrike">
+                <a:solidFill>
+                  <a:srgbClr val="000000"/>
+                </a:solidFill>
+                <a:latin typeface="Arial"/>
+              </a:rPr>
+              <a:t>form</a:t>
+            </a:r>
+            <a:r>
+              <a:rPr b="0" lang="en-US" sz="4400" spc="-1" strike="noStrike">
+                <a:solidFill>
+                  <a:srgbClr val="000000"/>
+                </a:solidFill>
+                <a:latin typeface="Arial"/>
+              </a:rPr>
+              <a:t>at</a:t>
+            </a:r>
+            <a:endParaRPr b="0" lang="en-US" sz="4400" spc="-1" strike="noStrike">
+              <a:solidFill>
+                <a:srgbClr val="000000"/>
+              </a:solidFill>
+              <a:latin typeface="Arial"/>
             </a:endParaRPr>
           </a:p>
         </p:txBody>
@@ -1894,7 +2057,7 @@
         </p:spPr>
         <p:txBody>
           <a:bodyPr lIns="0" rIns="0" tIns="0" bIns="0" anchor="t">
-            <a:normAutofit fontScale="95303"/>
+            <a:normAutofit/>
           </a:bodyPr>
           <a:p>
             <a:pPr marL="432000" indent="-324000">
@@ -1911,17 +2074,17 @@
             <a:r>
               <a:rPr b="0" lang="en-US" sz="3200" spc="-1" strike="noStrike">
                 <a:solidFill>
-                  <a:schemeClr val="dk1"/>
+                  <a:srgbClr val="000000"/>
                 </a:solidFill>
-                <a:latin typeface="Calibri"/>
+                <a:latin typeface="Arial"/>
               </a:rPr>
               <a:t>Click to edit the outline text format</a:t>
             </a:r>
             <a:endParaRPr b="0" lang="en-US" sz="3200" spc="-1" strike="noStrike">
               <a:solidFill>
-                <a:schemeClr val="dk1"/>
-              </a:solidFill>
-              <a:latin typeface="Calibri"/>
+                <a:srgbClr val="000000"/>
+              </a:solidFill>
+              <a:latin typeface="Arial"/>
             </a:endParaRPr>
           </a:p>
           <a:p>
@@ -1937,19 +2100,19 @@
               <a:buChar char=""/>
             </a:pPr>
             <a:r>
-              <a:rPr b="0" lang="en-US" sz="2400" spc="-1" strike="noStrike">
+              <a:rPr b="0" lang="en-US" sz="2800" spc="-1" strike="noStrike">
                 <a:solidFill>
-                  <a:schemeClr val="dk1"/>
+                  <a:srgbClr val="000000"/>
                 </a:solidFill>
-                <a:latin typeface="Calibri"/>
+                <a:latin typeface="Arial"/>
               </a:rPr>
               <a:t>Second Outline Level</a:t>
             </a:r>
-            <a:endParaRPr b="0" lang="en-US" sz="2400" spc="-1" strike="noStrike">
-              <a:solidFill>
-                <a:schemeClr val="dk1"/>
-              </a:solidFill>
-              <a:latin typeface="Calibri"/>
+            <a:endParaRPr b="0" lang="en-US" sz="2800" spc="-1" strike="noStrike">
+              <a:solidFill>
+                <a:srgbClr val="000000"/>
+              </a:solidFill>
+              <a:latin typeface="Arial"/>
             </a:endParaRPr>
           </a:p>
           <a:p>
@@ -1965,19 +2128,19 @@
               <a:buChar char=""/>
             </a:pPr>
             <a:r>
-              <a:rPr b="0" lang="en-US" sz="2000" spc="-1" strike="noStrike">
+              <a:rPr b="0" lang="en-US" sz="2400" spc="-1" strike="noStrike">
                 <a:solidFill>
-                  <a:schemeClr val="dk1"/>
+                  <a:srgbClr val="000000"/>
                 </a:solidFill>
-                <a:latin typeface="Calibri"/>
+                <a:latin typeface="Arial"/>
               </a:rPr>
               <a:t>Third Outline Level</a:t>
             </a:r>
-            <a:endParaRPr b="0" lang="en-US" sz="2000" spc="-1" strike="noStrike">
-              <a:solidFill>
-                <a:schemeClr val="dk1"/>
-              </a:solidFill>
-              <a:latin typeface="Calibri"/>
+            <a:endParaRPr b="0" lang="en-US" sz="2400" spc="-1" strike="noStrike">
+              <a:solidFill>
+                <a:srgbClr val="000000"/>
+              </a:solidFill>
+              <a:latin typeface="Arial"/>
             </a:endParaRPr>
           </a:p>
           <a:p>
@@ -1995,17 +2158,17 @@
             <a:r>
               <a:rPr b="0" lang="en-US" sz="2000" spc="-1" strike="noStrike">
                 <a:solidFill>
-                  <a:schemeClr val="dk1"/>
+                  <a:srgbClr val="000000"/>
                 </a:solidFill>
-                <a:latin typeface="Calibri"/>
+                <a:latin typeface="Arial"/>
               </a:rPr>
               <a:t>Fourth Outline Level</a:t>
             </a:r>
             <a:endParaRPr b="0" lang="en-US" sz="2000" spc="-1" strike="noStrike">
               <a:solidFill>
-                <a:schemeClr val="dk1"/>
-              </a:solidFill>
-              <a:latin typeface="Calibri"/>
+                <a:srgbClr val="000000"/>
+              </a:solidFill>
+              <a:latin typeface="Arial"/>
             </a:endParaRPr>
           </a:p>
           <a:p>
@@ -2023,17 +2186,17 @@
             <a:r>
               <a:rPr b="0" lang="en-US" sz="2000" spc="-1" strike="noStrike">
                 <a:solidFill>
-                  <a:schemeClr val="dk1"/>
+                  <a:srgbClr val="000000"/>
                 </a:solidFill>
-                <a:latin typeface="Calibri"/>
+                <a:latin typeface="Arial"/>
               </a:rPr>
               <a:t>Fifth Outline Level</a:t>
             </a:r>
             <a:endParaRPr b="0" lang="en-US" sz="2000" spc="-1" strike="noStrike">
               <a:solidFill>
-                <a:schemeClr val="dk1"/>
-              </a:solidFill>
-              <a:latin typeface="Calibri"/>
+                <a:srgbClr val="000000"/>
+              </a:solidFill>
+              <a:latin typeface="Arial"/>
             </a:endParaRPr>
           </a:p>
           <a:p>
@@ -2051,17 +2214,17 @@
             <a:r>
               <a:rPr b="0" lang="en-US" sz="2000" spc="-1" strike="noStrike">
                 <a:solidFill>
-                  <a:schemeClr val="dk1"/>
+                  <a:srgbClr val="000000"/>
                 </a:solidFill>
-                <a:latin typeface="Calibri"/>
+                <a:latin typeface="Arial"/>
               </a:rPr>
               <a:t>Sixth Outline Level</a:t>
             </a:r>
             <a:endParaRPr b="0" lang="en-US" sz="2000" spc="-1" strike="noStrike">
               <a:solidFill>
-                <a:schemeClr val="dk1"/>
-              </a:solidFill>
-              <a:latin typeface="Calibri"/>
+                <a:srgbClr val="000000"/>
+              </a:solidFill>
+              <a:latin typeface="Arial"/>
             </a:endParaRPr>
           </a:p>
           <a:p>
@@ -2079,17 +2242,17 @@
             <a:r>
               <a:rPr b="0" lang="en-US" sz="2000" spc="-1" strike="noStrike">
                 <a:solidFill>
-                  <a:schemeClr val="dk1"/>
+                  <a:srgbClr val="000000"/>
                 </a:solidFill>
-                <a:latin typeface="Calibri"/>
+                <a:latin typeface="Arial"/>
               </a:rPr>
               <a:t>Seventh Outline Level</a:t>
             </a:r>
             <a:endParaRPr b="0" lang="en-US" sz="2000" spc="-1" strike="noStrike">
               <a:solidFill>
-                <a:schemeClr val="dk1"/>
-              </a:solidFill>
-              <a:latin typeface="Calibri"/>
+                <a:srgbClr val="000000"/>
+              </a:solidFill>
+              <a:latin typeface="Arial"/>
             </a:endParaRPr>
           </a:p>
         </p:txBody>
@@ -3407,7 +3570,7 @@
         <p:spPr>
           <a:xfrm>
             <a:off x="6217920" y="-1645920"/>
-            <a:ext cx="5486040" cy="5486040"/>
+            <a:ext cx="5485680" cy="5485680"/>
           </a:xfrm>
           <a:prstGeom prst="ellipse">
             <a:avLst/>
@@ -3433,6 +3596,11 @@
             <a:noAutofit/>
           </a:bodyPr>
           <a:p>
+            <a:pPr>
+              <a:lnSpc>
+                <a:spcPct val="100000"/>
+              </a:lnSpc>
+            </a:pPr>
             <a:endParaRPr b="0" lang="en-US" sz="1800" spc="-1" strike="noStrike">
               <a:solidFill>
                 <a:srgbClr val="ffffff"/>
@@ -3451,7 +3619,7 @@
         <p:spPr>
           <a:xfrm>
             <a:off x="7498080" y="457200"/>
-            <a:ext cx="2377080" cy="2377080"/>
+            <a:ext cx="2376720" cy="2376720"/>
           </a:xfrm>
           <a:prstGeom prst="ellipse">
             <a:avLst/>
@@ -3481,6 +3649,11 @@
             <a:noAutofit/>
           </a:bodyPr>
           <a:p>
+            <a:pPr>
+              <a:lnSpc>
+                <a:spcPct val="100000"/>
+              </a:lnSpc>
+            </a:pPr>
             <a:endParaRPr b="0" lang="en-US" sz="1800" spc="-1" strike="noStrike">
               <a:solidFill>
                 <a:srgbClr val="ffffff"/>
@@ -3499,7 +3672,7 @@
         <p:spPr>
           <a:xfrm>
             <a:off x="-1371600" y="3474720"/>
-            <a:ext cx="3657240" cy="3657240"/>
+            <a:ext cx="3656880" cy="3656880"/>
           </a:xfrm>
           <a:prstGeom prst="ellipse">
             <a:avLst/>
@@ -3529,6 +3702,11 @@
             <a:noAutofit/>
           </a:bodyPr>
           <a:p>
+            <a:pPr>
+              <a:lnSpc>
+                <a:spcPct val="100000"/>
+              </a:lnSpc>
+            </a:pPr>
             <a:endParaRPr b="0" lang="en-US" sz="1800" spc="-1" strike="noStrike">
               <a:solidFill>
                 <a:srgbClr val="ffffff"/>
@@ -3547,7 +3725,7 @@
         <p:spPr>
           <a:xfrm>
             <a:off x="4206240" y="347400"/>
-            <a:ext cx="255600" cy="255600"/>
+            <a:ext cx="255240" cy="255240"/>
           </a:xfrm>
           <a:prstGeom prst="ellipse">
             <a:avLst/>
@@ -3573,6 +3751,11 @@
             <a:noAutofit/>
           </a:bodyPr>
           <a:p>
+            <a:pPr>
+              <a:lnSpc>
+                <a:spcPct val="100000"/>
+              </a:lnSpc>
+            </a:pPr>
             <a:endParaRPr b="0" lang="en-US" sz="1800" spc="-1" strike="noStrike">
               <a:solidFill>
                 <a:srgbClr val="000000"/>
@@ -3591,7 +3774,7 @@
         <p:spPr>
           <a:xfrm>
             <a:off x="4846320" y="658440"/>
-            <a:ext cx="164160" cy="164160"/>
+            <a:ext cx="163800" cy="163800"/>
           </a:xfrm>
           <a:prstGeom prst="ellipse">
             <a:avLst/>
@@ -3617,6 +3800,11 @@
             <a:noAutofit/>
           </a:bodyPr>
           <a:p>
+            <a:pPr>
+              <a:lnSpc>
+                <a:spcPct val="100000"/>
+              </a:lnSpc>
+            </a:pPr>
             <a:endParaRPr b="0" lang="en-US" sz="1800" spc="-1" strike="noStrike">
               <a:solidFill>
                 <a:srgbClr val="ffffff"/>
@@ -3635,7 +3823,7 @@
         <p:spPr>
           <a:xfrm>
             <a:off x="3657600" y="749880"/>
-            <a:ext cx="127800" cy="127800"/>
+            <a:ext cx="127440" cy="127440"/>
           </a:xfrm>
           <a:prstGeom prst="ellipse">
             <a:avLst/>
@@ -3661,6 +3849,11 @@
             <a:noAutofit/>
           </a:bodyPr>
           <a:p>
+            <a:pPr>
+              <a:lnSpc>
+                <a:spcPct val="100000"/>
+              </a:lnSpc>
+            </a:pPr>
             <a:endParaRPr b="0" lang="en-US" sz="1800" spc="-1" strike="noStrike">
               <a:solidFill>
                 <a:srgbClr val="000000"/>
@@ -3679,7 +3872,7 @@
         <p:spPr>
           <a:xfrm>
             <a:off x="0" y="0"/>
-            <a:ext cx="200880" cy="5143320"/>
+            <a:ext cx="200520" cy="5142960"/>
           </a:xfrm>
           <a:prstGeom prst="rect">
             <a:avLst/>
@@ -3705,6 +3898,11 @@
             <a:noAutofit/>
           </a:bodyPr>
           <a:p>
+            <a:pPr>
+              <a:lnSpc>
+                <a:spcPct val="100000"/>
+              </a:lnSpc>
+            </a:pPr>
             <a:endParaRPr b="0" lang="en-US" sz="1800" spc="-1" strike="noStrike">
               <a:solidFill>
                 <a:srgbClr val="000000"/>
@@ -3723,7 +3921,7 @@
         <p:spPr>
           <a:xfrm>
             <a:off x="457200" y="658440"/>
-            <a:ext cx="2742840" cy="383760"/>
+            <a:ext cx="2742480" cy="383400"/>
           </a:xfrm>
           <a:prstGeom prst="rect">
             <a:avLst/>
@@ -3749,6 +3947,11 @@
             <a:noAutofit/>
           </a:bodyPr>
           <a:p>
+            <a:pPr>
+              <a:lnSpc>
+                <a:spcPct val="100000"/>
+              </a:lnSpc>
+            </a:pPr>
             <a:endParaRPr b="0" lang="en-US" sz="1800" spc="-1" strike="noStrike">
               <a:solidFill>
                 <a:srgbClr val="ffffff"/>
@@ -3767,7 +3970,7 @@
         <p:spPr>
           <a:xfrm>
             <a:off x="457200" y="658440"/>
-            <a:ext cx="2742840" cy="383760"/>
+            <a:ext cx="2742480" cy="383400"/>
           </a:xfrm>
           <a:prstGeom prst="rect">
             <a:avLst/>
@@ -3797,13 +4000,22 @@
               </a:tabLst>
             </a:pPr>
             <a:r>
-              <a:rPr b="1" lang="en-US" sz="950" spc="148" strike="noStrike">
+              <a:rPr b="1" lang="en-US" sz="950" spc="145" strike="noStrike">
                 <a:solidFill>
                   <a:srgbClr val="0a0f0d"/>
                 </a:solidFill>
                 <a:latin typeface="Calibri"/>
               </a:rPr>
-              <a:t>CYBERSECURITY  ·  DATA MINING</a:t>
+              <a:t>  </a:t>
+            </a:r>
+            <a:r>
+              <a:rPr b="1" lang="en-US" sz="950" spc="145" strike="noStrike">
+                <a:solidFill>
+                  <a:srgbClr val="0a0f0d"/>
+                </a:solidFill>
+                <a:latin typeface="Calibri"/>
+              </a:rPr>
+              <a:t>·  DATA MINING</a:t>
             </a:r>
             <a:endParaRPr b="0" lang="en-US" sz="950" spc="-1" strike="noStrike">
               <a:solidFill>
@@ -3823,7 +4035,7 @@
         <p:spPr>
           <a:xfrm>
             <a:off x="457200" y="1170360"/>
-            <a:ext cx="8229240" cy="776880"/>
+            <a:ext cx="8228880" cy="776520"/>
           </a:xfrm>
           <a:prstGeom prst="rect">
             <a:avLst/>
@@ -3880,7 +4092,7 @@
         <p:spPr>
           <a:xfrm>
             <a:off x="457200" y="1901880"/>
-            <a:ext cx="8229240" cy="822600"/>
+            <a:ext cx="8228880" cy="822240"/>
           </a:xfrm>
           <a:prstGeom prst="rect">
             <a:avLst/>
@@ -3937,7 +4149,7 @@
         <p:spPr>
           <a:xfrm>
             <a:off x="457200" y="2679120"/>
-            <a:ext cx="6400440" cy="685440"/>
+            <a:ext cx="6400080" cy="685080"/>
           </a:xfrm>
           <a:prstGeom prst="rect">
             <a:avLst/>
@@ -3994,7 +4206,7 @@
         <p:spPr>
           <a:xfrm>
             <a:off x="457200" y="3456360"/>
-            <a:ext cx="7772040" cy="365400"/>
+            <a:ext cx="7771680" cy="365040"/>
           </a:xfrm>
           <a:prstGeom prst="rect">
             <a:avLst/>
@@ -4051,7 +4263,7 @@
         <p:spPr>
           <a:xfrm>
             <a:off x="457200" y="3950280"/>
-            <a:ext cx="1992960" cy="914040"/>
+            <a:ext cx="1992600" cy="913680"/>
           </a:xfrm>
           <a:prstGeom prst="rect">
             <a:avLst/>
@@ -4077,6 +4289,11 @@
             <a:noAutofit/>
           </a:bodyPr>
           <a:p>
+            <a:pPr>
+              <a:lnSpc>
+                <a:spcPct val="100000"/>
+              </a:lnSpc>
+            </a:pPr>
             <a:endParaRPr b="0" lang="en-US" sz="1800" spc="-1" strike="noStrike">
               <a:solidFill>
                 <a:srgbClr val="ffffff"/>
@@ -4095,7 +4312,7 @@
         <p:spPr>
           <a:xfrm>
             <a:off x="457200" y="3968640"/>
-            <a:ext cx="1992960" cy="475200"/>
+            <a:ext cx="1992600" cy="474840"/>
           </a:xfrm>
           <a:prstGeom prst="rect">
             <a:avLst/>
@@ -4152,7 +4369,7 @@
         <p:spPr>
           <a:xfrm>
             <a:off x="457200" y="4443840"/>
-            <a:ext cx="1992960" cy="383760"/>
+            <a:ext cx="1992600" cy="383400"/>
           </a:xfrm>
           <a:prstGeom prst="rect">
             <a:avLst/>
@@ -4235,7 +4452,7 @@
         <p:spPr>
           <a:xfrm>
             <a:off x="2624400" y="3950280"/>
-            <a:ext cx="1992960" cy="914040"/>
+            <a:ext cx="1992600" cy="913680"/>
           </a:xfrm>
           <a:prstGeom prst="rect">
             <a:avLst/>
@@ -4261,6 +4478,11 @@
             <a:noAutofit/>
           </a:bodyPr>
           <a:p>
+            <a:pPr>
+              <a:lnSpc>
+                <a:spcPct val="100000"/>
+              </a:lnSpc>
+            </a:pPr>
             <a:endParaRPr b="0" lang="en-US" sz="1800" spc="-1" strike="noStrike">
               <a:solidFill>
                 <a:srgbClr val="ffffff"/>
@@ -4279,7 +4501,7 @@
         <p:spPr>
           <a:xfrm>
             <a:off x="2624400" y="3968640"/>
-            <a:ext cx="1992960" cy="475200"/>
+            <a:ext cx="1992600" cy="474840"/>
           </a:xfrm>
           <a:prstGeom prst="rect">
             <a:avLst/>
@@ -4336,7 +4558,7 @@
         <p:spPr>
           <a:xfrm>
             <a:off x="2624400" y="4443840"/>
-            <a:ext cx="1992960" cy="383760"/>
+            <a:ext cx="1992600" cy="383400"/>
           </a:xfrm>
           <a:prstGeom prst="rect">
             <a:avLst/>
@@ -4419,7 +4641,7 @@
         <p:spPr>
           <a:xfrm>
             <a:off x="4791600" y="3950280"/>
-            <a:ext cx="1992960" cy="914040"/>
+            <a:ext cx="1992600" cy="913680"/>
           </a:xfrm>
           <a:prstGeom prst="rect">
             <a:avLst/>
@@ -4445,6 +4667,11 @@
             <a:noAutofit/>
           </a:bodyPr>
           <a:p>
+            <a:pPr>
+              <a:lnSpc>
+                <a:spcPct val="100000"/>
+              </a:lnSpc>
+            </a:pPr>
             <a:endParaRPr b="0" lang="en-US" sz="1800" spc="-1" strike="noStrike">
               <a:solidFill>
                 <a:srgbClr val="ffffff"/>
@@ -4463,7 +4690,7 @@
         <p:spPr>
           <a:xfrm>
             <a:off x="4791600" y="3968640"/>
-            <a:ext cx="1992960" cy="475200"/>
+            <a:ext cx="1992600" cy="474840"/>
           </a:xfrm>
           <a:prstGeom prst="rect">
             <a:avLst/>
@@ -4520,7 +4747,7 @@
         <p:spPr>
           <a:xfrm>
             <a:off x="4791600" y="4443840"/>
-            <a:ext cx="1992960" cy="383760"/>
+            <a:ext cx="1992600" cy="383400"/>
           </a:xfrm>
           <a:prstGeom prst="rect">
             <a:avLst/>
@@ -4603,7 +4830,7 @@
         <p:spPr>
           <a:xfrm>
             <a:off x="6958440" y="3950280"/>
-            <a:ext cx="1992960" cy="914040"/>
+            <a:ext cx="1992600" cy="913680"/>
           </a:xfrm>
           <a:prstGeom prst="rect">
             <a:avLst/>
@@ -4629,6 +4856,11 @@
             <a:noAutofit/>
           </a:bodyPr>
           <a:p>
+            <a:pPr>
+              <a:lnSpc>
+                <a:spcPct val="100000"/>
+              </a:lnSpc>
+            </a:pPr>
             <a:endParaRPr b="0" lang="en-US" sz="1800" spc="-1" strike="noStrike">
               <a:solidFill>
                 <a:srgbClr val="ffffff"/>
@@ -4647,7 +4879,7 @@
         <p:spPr>
           <a:xfrm>
             <a:off x="6958440" y="3968640"/>
-            <a:ext cx="1992960" cy="475200"/>
+            <a:ext cx="1992600" cy="474840"/>
           </a:xfrm>
           <a:prstGeom prst="rect">
             <a:avLst/>
@@ -4704,7 +4936,7 @@
         <p:spPr>
           <a:xfrm>
             <a:off x="6958440" y="4443840"/>
-            <a:ext cx="1992960" cy="383760"/>
+            <a:ext cx="1992600" cy="383400"/>
           </a:xfrm>
           <a:prstGeom prst="rect">
             <a:avLst/>
@@ -4824,7 +5056,7 @@
         <p:spPr>
           <a:xfrm>
             <a:off x="0" y="0"/>
-            <a:ext cx="9143640" cy="959760"/>
+            <a:ext cx="9143280" cy="959400"/>
           </a:xfrm>
           <a:prstGeom prst="rect">
             <a:avLst/>
@@ -4850,6 +5082,11 @@
             <a:noAutofit/>
           </a:bodyPr>
           <a:p>
+            <a:pPr>
+              <a:lnSpc>
+                <a:spcPct val="100000"/>
+              </a:lnSpc>
+            </a:pPr>
             <a:endParaRPr b="0" lang="en-US" sz="1800" spc="-1" strike="noStrike">
               <a:solidFill>
                 <a:srgbClr val="ffffff"/>
@@ -4868,7 +5105,7 @@
         <p:spPr>
           <a:xfrm>
             <a:off x="0" y="960120"/>
-            <a:ext cx="9143640" cy="63720"/>
+            <a:ext cx="9143280" cy="63360"/>
           </a:xfrm>
           <a:prstGeom prst="rect">
             <a:avLst/>
@@ -4894,6 +5131,11 @@
             <a:noAutofit/>
           </a:bodyPr>
           <a:p>
+            <a:pPr>
+              <a:lnSpc>
+                <a:spcPct val="100000"/>
+              </a:lnSpc>
+            </a:pPr>
             <a:endParaRPr b="0" lang="en-US" sz="1800" spc="-1" strike="noStrike">
               <a:solidFill>
                 <a:srgbClr val="000000"/>
@@ -4912,7 +5154,7 @@
         <p:spPr>
           <a:xfrm>
             <a:off x="411480" y="0"/>
-            <a:ext cx="8320680" cy="959760"/>
+            <a:ext cx="8320320" cy="959400"/>
           </a:xfrm>
           <a:prstGeom prst="rect">
             <a:avLst/>
@@ -4969,7 +5211,7 @@
         <p:spPr>
           <a:xfrm>
             <a:off x="365760" y="1170360"/>
-            <a:ext cx="8412120" cy="895680"/>
+            <a:ext cx="8411760" cy="895320"/>
           </a:xfrm>
           <a:prstGeom prst="rect">
             <a:avLst/>
@@ -5002,6 +5244,11 @@
             <a:noAutofit/>
           </a:bodyPr>
           <a:p>
+            <a:pPr>
+              <a:lnSpc>
+                <a:spcPct val="100000"/>
+              </a:lnSpc>
+            </a:pPr>
             <a:endParaRPr b="0" lang="en-US" sz="1800" spc="-1" strike="noStrike">
               <a:solidFill>
                 <a:srgbClr val="ffffff"/>
@@ -5020,7 +5267,7 @@
         <p:spPr>
           <a:xfrm>
             <a:off x="530280" y="1188720"/>
-            <a:ext cx="8092080" cy="840960"/>
+            <a:ext cx="8091720" cy="840600"/>
           </a:xfrm>
           <a:prstGeom prst="rect">
             <a:avLst/>
@@ -5107,7 +5354,7 @@
         <p:spPr>
           <a:xfrm>
             <a:off x="365760" y="2212920"/>
-            <a:ext cx="4224240" cy="2697120"/>
+            <a:ext cx="4223880" cy="2696760"/>
           </a:xfrm>
           <a:prstGeom prst="rect">
             <a:avLst/>
@@ -5140,6 +5387,11 @@
             <a:noAutofit/>
           </a:bodyPr>
           <a:p>
+            <a:pPr>
+              <a:lnSpc>
+                <a:spcPct val="100000"/>
+              </a:lnSpc>
+            </a:pPr>
             <a:endParaRPr b="0" lang="en-US" sz="1800" spc="-1" strike="noStrike">
               <a:solidFill>
                 <a:srgbClr val="ffffff"/>
@@ -5158,7 +5410,7 @@
         <p:spPr>
           <a:xfrm>
             <a:off x="365760" y="2212920"/>
-            <a:ext cx="4224240" cy="511560"/>
+            <a:ext cx="4223880" cy="511200"/>
           </a:xfrm>
           <a:prstGeom prst="rect">
             <a:avLst/>
@@ -5184,6 +5436,11 @@
             <a:noAutofit/>
           </a:bodyPr>
           <a:p>
+            <a:pPr>
+              <a:lnSpc>
+                <a:spcPct val="100000"/>
+              </a:lnSpc>
+            </a:pPr>
             <a:endParaRPr b="0" lang="en-US" sz="1800" spc="-1" strike="noStrike">
               <a:solidFill>
                 <a:srgbClr val="ffffff"/>
@@ -5202,7 +5459,7 @@
         <p:spPr>
           <a:xfrm>
             <a:off x="475560" y="2212920"/>
-            <a:ext cx="4004640" cy="511560"/>
+            <a:ext cx="4004280" cy="511200"/>
           </a:xfrm>
           <a:prstGeom prst="rect">
             <a:avLst/>
@@ -5269,7 +5526,7 @@
         <p:spPr>
           <a:xfrm>
             <a:off x="475560" y="2779920"/>
-            <a:ext cx="4004640" cy="255600"/>
+            <a:ext cx="4004280" cy="255240"/>
           </a:xfrm>
           <a:prstGeom prst="rect">
             <a:avLst/>
@@ -5326,7 +5583,7 @@
         <p:spPr>
           <a:xfrm>
             <a:off x="493920" y="3072240"/>
-            <a:ext cx="3968280" cy="402120"/>
+            <a:ext cx="3967920" cy="401760"/>
           </a:xfrm>
           <a:prstGeom prst="rect">
             <a:avLst/>
@@ -5393,7 +5650,7 @@
         <p:spPr>
           <a:xfrm>
             <a:off x="493920" y="3511440"/>
-            <a:ext cx="3968280" cy="402120"/>
+            <a:ext cx="3967920" cy="401760"/>
           </a:xfrm>
           <a:prstGeom prst="rect">
             <a:avLst/>
@@ -5460,7 +5717,7 @@
         <p:spPr>
           <a:xfrm>
             <a:off x="493920" y="3950280"/>
-            <a:ext cx="3968280" cy="402120"/>
+            <a:ext cx="3967920" cy="401760"/>
           </a:xfrm>
           <a:prstGeom prst="rect">
             <a:avLst/>
@@ -5527,7 +5784,7 @@
         <p:spPr>
           <a:xfrm>
             <a:off x="493920" y="4389120"/>
-            <a:ext cx="3968280" cy="402120"/>
+            <a:ext cx="3967920" cy="401760"/>
           </a:xfrm>
           <a:prstGeom prst="rect">
             <a:avLst/>
@@ -5594,7 +5851,7 @@
         <p:spPr>
           <a:xfrm>
             <a:off x="4773240" y="2212920"/>
-            <a:ext cx="4224240" cy="2697120"/>
+            <a:ext cx="4223880" cy="2696760"/>
           </a:xfrm>
           <a:prstGeom prst="rect">
             <a:avLst/>
@@ -5627,6 +5884,11 @@
             <a:noAutofit/>
           </a:bodyPr>
           <a:p>
+            <a:pPr>
+              <a:lnSpc>
+                <a:spcPct val="100000"/>
+              </a:lnSpc>
+            </a:pPr>
             <a:endParaRPr b="0" lang="en-US" sz="1800" spc="-1" strike="noStrike">
               <a:solidFill>
                 <a:srgbClr val="ffffff"/>
@@ -5645,7 +5907,7 @@
         <p:spPr>
           <a:xfrm>
             <a:off x="4773240" y="2212920"/>
-            <a:ext cx="4224240" cy="511560"/>
+            <a:ext cx="4223880" cy="511200"/>
           </a:xfrm>
           <a:prstGeom prst="rect">
             <a:avLst/>
@@ -5671,6 +5933,11 @@
             <a:noAutofit/>
           </a:bodyPr>
           <a:p>
+            <a:pPr>
+              <a:lnSpc>
+                <a:spcPct val="100000"/>
+              </a:lnSpc>
+            </a:pPr>
             <a:endParaRPr b="0" lang="en-US" sz="1800" spc="-1" strike="noStrike">
               <a:solidFill>
                 <a:srgbClr val="ffffff"/>
@@ -5689,7 +5956,7 @@
         <p:spPr>
           <a:xfrm>
             <a:off x="4883040" y="2212920"/>
-            <a:ext cx="4004640" cy="511560"/>
+            <a:ext cx="4004280" cy="511200"/>
           </a:xfrm>
           <a:prstGeom prst="rect">
             <a:avLst/>
@@ -5756,7 +6023,7 @@
         <p:spPr>
           <a:xfrm>
             <a:off x="4883040" y="2779920"/>
-            <a:ext cx="4004640" cy="255600"/>
+            <a:ext cx="4004280" cy="255240"/>
           </a:xfrm>
           <a:prstGeom prst="rect">
             <a:avLst/>
@@ -5813,7 +6080,7 @@
         <p:spPr>
           <a:xfrm>
             <a:off x="4901040" y="3072240"/>
-            <a:ext cx="3968280" cy="402120"/>
+            <a:ext cx="3967920" cy="401760"/>
           </a:xfrm>
           <a:prstGeom prst="rect">
             <a:avLst/>
@@ -5880,7 +6147,7 @@
         <p:spPr>
           <a:xfrm>
             <a:off x="4901040" y="3511440"/>
-            <a:ext cx="3968280" cy="402120"/>
+            <a:ext cx="3967920" cy="401760"/>
           </a:xfrm>
           <a:prstGeom prst="rect">
             <a:avLst/>
@@ -5947,7 +6214,7 @@
         <p:spPr>
           <a:xfrm>
             <a:off x="4901040" y="3950280"/>
-            <a:ext cx="3968280" cy="402120"/>
+            <a:ext cx="3967920" cy="401760"/>
           </a:xfrm>
           <a:prstGeom prst="rect">
             <a:avLst/>
@@ -6014,7 +6281,7 @@
         <p:spPr>
           <a:xfrm>
             <a:off x="4901040" y="4389120"/>
-            <a:ext cx="3968280" cy="402120"/>
+            <a:ext cx="3967920" cy="401760"/>
           </a:xfrm>
           <a:prstGeom prst="rect">
             <a:avLst/>
@@ -7389,7 +7656,7 @@
         <p:spPr>
           <a:xfrm>
             <a:off x="0" y="0"/>
-            <a:ext cx="9143640" cy="914040"/>
+            <a:ext cx="9143280" cy="913680"/>
           </a:xfrm>
           <a:prstGeom prst="rect">
             <a:avLst/>
@@ -7415,6 +7682,11 @@
             <a:noAutofit/>
           </a:bodyPr>
           <a:p>
+            <a:pPr>
+              <a:lnSpc>
+                <a:spcPct val="100000"/>
+              </a:lnSpc>
+            </a:pPr>
             <a:endParaRPr b="0" lang="en-US" sz="1800" spc="-1" strike="noStrike">
               <a:solidFill>
                 <a:srgbClr val="ffffff"/>
@@ -7433,7 +7705,7 @@
         <p:spPr>
           <a:xfrm>
             <a:off x="0" y="914400"/>
-            <a:ext cx="9143640" cy="54360"/>
+            <a:ext cx="9143280" cy="54000"/>
           </a:xfrm>
           <a:prstGeom prst="rect">
             <a:avLst/>
@@ -7459,6 +7731,11 @@
             <a:noAutofit/>
           </a:bodyPr>
           <a:p>
+            <a:pPr>
+              <a:lnSpc>
+                <a:spcPct val="100000"/>
+              </a:lnSpc>
+            </a:pPr>
             <a:endParaRPr b="0" lang="en-US" sz="1800" spc="-1" strike="noStrike">
               <a:solidFill>
                 <a:srgbClr val="000000"/>
@@ -7477,7 +7754,7 @@
         <p:spPr>
           <a:xfrm>
             <a:off x="411480" y="0"/>
-            <a:ext cx="8320680" cy="914040"/>
+            <a:ext cx="8320320" cy="913680"/>
           </a:xfrm>
           <a:prstGeom prst="rect">
             <a:avLst/>
@@ -7534,7 +7811,7 @@
         <p:spPr>
           <a:xfrm>
             <a:off x="320040" y="1078920"/>
-            <a:ext cx="8503560" cy="914040"/>
+            <a:ext cx="8503200" cy="913680"/>
           </a:xfrm>
           <a:prstGeom prst="rect">
             <a:avLst/>
@@ -7560,6 +7837,11 @@
             <a:noAutofit/>
           </a:bodyPr>
           <a:p>
+            <a:pPr>
+              <a:lnSpc>
+                <a:spcPct val="100000"/>
+              </a:lnSpc>
+            </a:pPr>
             <a:endParaRPr b="0" lang="en-US" sz="1800" spc="-1" strike="noStrike">
               <a:solidFill>
                 <a:srgbClr val="ffffff"/>
@@ -7578,7 +7860,7 @@
         <p:spPr>
           <a:xfrm>
             <a:off x="475560" y="1097280"/>
-            <a:ext cx="8229240" cy="859320"/>
+            <a:ext cx="8228880" cy="858960"/>
           </a:xfrm>
           <a:prstGeom prst="rect">
             <a:avLst/>
@@ -7665,7 +7947,7 @@
         <p:spPr>
           <a:xfrm>
             <a:off x="320040" y="2148840"/>
-            <a:ext cx="2761200" cy="1481040"/>
+            <a:ext cx="2760840" cy="1480680"/>
           </a:xfrm>
           <a:prstGeom prst="rect">
             <a:avLst/>
@@ -7698,6 +7980,11 @@
             <a:noAutofit/>
           </a:bodyPr>
           <a:p>
+            <a:pPr>
+              <a:lnSpc>
+                <a:spcPct val="100000"/>
+              </a:lnSpc>
+            </a:pPr>
             <a:endParaRPr b="0" lang="en-US" sz="1800" spc="-1" strike="noStrike">
               <a:solidFill>
                 <a:srgbClr val="ffffff"/>
@@ -7716,7 +8003,7 @@
         <p:spPr>
           <a:xfrm>
             <a:off x="1417320" y="2030040"/>
-            <a:ext cx="529920" cy="529920"/>
+            <a:ext cx="529560" cy="529560"/>
           </a:xfrm>
           <a:prstGeom prst="ellipse">
             <a:avLst/>
@@ -7742,6 +8029,11 @@
             <a:noAutofit/>
           </a:bodyPr>
           <a:p>
+            <a:pPr>
+              <a:lnSpc>
+                <a:spcPct val="100000"/>
+              </a:lnSpc>
+            </a:pPr>
             <a:endParaRPr b="0" lang="en-US" sz="1800" spc="-1" strike="noStrike">
               <a:solidFill>
                 <a:srgbClr val="ffffff"/>
@@ -7760,7 +8052,7 @@
         <p:spPr>
           <a:xfrm>
             <a:off x="1417320" y="2030040"/>
-            <a:ext cx="529920" cy="529920"/>
+            <a:ext cx="529560" cy="529560"/>
           </a:xfrm>
           <a:prstGeom prst="rect">
             <a:avLst/>
@@ -7816,7 +8108,7 @@
         <p:spPr>
           <a:xfrm>
             <a:off x="411480" y="2651760"/>
-            <a:ext cx="2578320" cy="328680"/>
+            <a:ext cx="2577960" cy="328320"/>
           </a:xfrm>
           <a:prstGeom prst="rect">
             <a:avLst/>
@@ -7873,7 +8165,7 @@
         <p:spPr>
           <a:xfrm>
             <a:off x="429840" y="2999160"/>
-            <a:ext cx="2541600" cy="548280"/>
+            <a:ext cx="2541240" cy="547920"/>
           </a:xfrm>
           <a:prstGeom prst="rect">
             <a:avLst/>
@@ -7930,7 +8222,7 @@
         <p:spPr>
           <a:xfrm>
             <a:off x="3227760" y="2148840"/>
-            <a:ext cx="2761200" cy="1481040"/>
+            <a:ext cx="2760840" cy="1480680"/>
           </a:xfrm>
           <a:prstGeom prst="rect">
             <a:avLst/>
@@ -7963,6 +8255,11 @@
             <a:noAutofit/>
           </a:bodyPr>
           <a:p>
+            <a:pPr>
+              <a:lnSpc>
+                <a:spcPct val="100000"/>
+              </a:lnSpc>
+            </a:pPr>
             <a:endParaRPr b="0" lang="en-US" sz="1800" spc="-1" strike="noStrike">
               <a:solidFill>
                 <a:srgbClr val="ffffff"/>
@@ -7981,7 +8278,7 @@
         <p:spPr>
           <a:xfrm>
             <a:off x="4325040" y="2030040"/>
-            <a:ext cx="529920" cy="529920"/>
+            <a:ext cx="529560" cy="529560"/>
           </a:xfrm>
           <a:prstGeom prst="ellipse">
             <a:avLst/>
@@ -8007,6 +8304,11 @@
             <a:noAutofit/>
           </a:bodyPr>
           <a:p>
+            <a:pPr>
+              <a:lnSpc>
+                <a:spcPct val="100000"/>
+              </a:lnSpc>
+            </a:pPr>
             <a:endParaRPr b="0" lang="en-US" sz="1800" spc="-1" strike="noStrike">
               <a:solidFill>
                 <a:srgbClr val="ffffff"/>
@@ -8025,7 +8327,7 @@
         <p:spPr>
           <a:xfrm>
             <a:off x="4325040" y="2030040"/>
-            <a:ext cx="529920" cy="529920"/>
+            <a:ext cx="529560" cy="529560"/>
           </a:xfrm>
           <a:prstGeom prst="rect">
             <a:avLst/>
@@ -8081,7 +8383,7 @@
         <p:spPr>
           <a:xfrm>
             <a:off x="3319200" y="2651760"/>
-            <a:ext cx="2578320" cy="328680"/>
+            <a:ext cx="2577960" cy="328320"/>
           </a:xfrm>
           <a:prstGeom prst="rect">
             <a:avLst/>
@@ -8138,7 +8440,7 @@
         <p:spPr>
           <a:xfrm>
             <a:off x="3337560" y="2999160"/>
-            <a:ext cx="2541600" cy="548280"/>
+            <a:ext cx="2541240" cy="547920"/>
           </a:xfrm>
           <a:prstGeom prst="rect">
             <a:avLst/>
@@ -8195,7 +8497,7 @@
         <p:spPr>
           <a:xfrm>
             <a:off x="6135480" y="2148840"/>
-            <a:ext cx="2761200" cy="1481040"/>
+            <a:ext cx="2760840" cy="1480680"/>
           </a:xfrm>
           <a:prstGeom prst="rect">
             <a:avLst/>
@@ -8228,6 +8530,11 @@
             <a:noAutofit/>
           </a:bodyPr>
           <a:p>
+            <a:pPr>
+              <a:lnSpc>
+                <a:spcPct val="100000"/>
+              </a:lnSpc>
+            </a:pPr>
             <a:endParaRPr b="0" lang="en-US" sz="1800" spc="-1" strike="noStrike">
               <a:solidFill>
                 <a:srgbClr val="ffffff"/>
@@ -8246,7 +8553,7 @@
         <p:spPr>
           <a:xfrm>
             <a:off x="7232760" y="2030040"/>
-            <a:ext cx="529920" cy="529920"/>
+            <a:ext cx="529560" cy="529560"/>
           </a:xfrm>
           <a:prstGeom prst="ellipse">
             <a:avLst/>
@@ -8272,6 +8579,11 @@
             <a:noAutofit/>
           </a:bodyPr>
           <a:p>
+            <a:pPr>
+              <a:lnSpc>
+                <a:spcPct val="100000"/>
+              </a:lnSpc>
+            </a:pPr>
             <a:endParaRPr b="0" lang="en-US" sz="1800" spc="-1" strike="noStrike">
               <a:solidFill>
                 <a:srgbClr val="ffffff"/>
@@ -8290,7 +8602,7 @@
         <p:spPr>
           <a:xfrm>
             <a:off x="7232760" y="2030040"/>
-            <a:ext cx="529920" cy="529920"/>
+            <a:ext cx="529560" cy="529560"/>
           </a:xfrm>
           <a:prstGeom prst="rect">
             <a:avLst/>
@@ -8346,7 +8658,7 @@
         <p:spPr>
           <a:xfrm>
             <a:off x="6226920" y="2651760"/>
-            <a:ext cx="2578320" cy="328680"/>
+            <a:ext cx="2577960" cy="328320"/>
           </a:xfrm>
           <a:prstGeom prst="rect">
             <a:avLst/>
@@ -8403,7 +8715,7 @@
         <p:spPr>
           <a:xfrm>
             <a:off x="6245280" y="2999160"/>
-            <a:ext cx="2541600" cy="548280"/>
+            <a:ext cx="2541240" cy="547920"/>
           </a:xfrm>
           <a:prstGeom prst="rect">
             <a:avLst/>
@@ -8460,7 +8772,7 @@
         <p:spPr>
           <a:xfrm>
             <a:off x="320040" y="3767400"/>
-            <a:ext cx="8503560" cy="456840"/>
+            <a:ext cx="8503200" cy="456480"/>
           </a:xfrm>
           <a:prstGeom prst="rect">
             <a:avLst/>
@@ -8486,6 +8798,11 @@
             <a:noAutofit/>
           </a:bodyPr>
           <a:p>
+            <a:pPr>
+              <a:lnSpc>
+                <a:spcPct val="100000"/>
+              </a:lnSpc>
+            </a:pPr>
             <a:endParaRPr b="0" lang="en-US" sz="1800" spc="-1" strike="noStrike">
               <a:solidFill>
                 <a:srgbClr val="ffffff"/>
@@ -8504,7 +8821,7 @@
         <p:spPr>
           <a:xfrm>
             <a:off x="457200" y="3785760"/>
-            <a:ext cx="1371240" cy="420120"/>
+            <a:ext cx="1370880" cy="419760"/>
           </a:xfrm>
           <a:prstGeom prst="rect">
             <a:avLst/>
@@ -8561,7 +8878,7 @@
         <p:spPr>
           <a:xfrm>
             <a:off x="1920240" y="3822120"/>
-            <a:ext cx="2057040" cy="328680"/>
+            <a:ext cx="2056680" cy="328320"/>
           </a:xfrm>
           <a:prstGeom prst="rect">
             <a:avLst/>
@@ -8587,6 +8904,11 @@
             <a:noAutofit/>
           </a:bodyPr>
           <a:p>
+            <a:pPr>
+              <a:lnSpc>
+                <a:spcPct val="100000"/>
+              </a:lnSpc>
+            </a:pPr>
             <a:endParaRPr b="0" lang="en-US" sz="1800" spc="-1" strike="noStrike">
               <a:solidFill>
                 <a:srgbClr val="ffffff"/>
@@ -8605,7 +8927,7 @@
         <p:spPr>
           <a:xfrm>
             <a:off x="1920240" y="3822120"/>
-            <a:ext cx="2057040" cy="328680"/>
+            <a:ext cx="2056680" cy="328320"/>
           </a:xfrm>
           <a:prstGeom prst="rect">
             <a:avLst/>
@@ -8662,7 +8984,7 @@
         <p:spPr>
           <a:xfrm>
             <a:off x="4206240" y="3822120"/>
-            <a:ext cx="2057040" cy="328680"/>
+            <a:ext cx="2056680" cy="328320"/>
           </a:xfrm>
           <a:prstGeom prst="rect">
             <a:avLst/>
@@ -8688,6 +9010,11 @@
             <a:noAutofit/>
           </a:bodyPr>
           <a:p>
+            <a:pPr>
+              <a:lnSpc>
+                <a:spcPct val="100000"/>
+              </a:lnSpc>
+            </a:pPr>
             <a:endParaRPr b="0" lang="en-US" sz="1800" spc="-1" strike="noStrike">
               <a:solidFill>
                 <a:srgbClr val="ffffff"/>
@@ -8706,7 +9033,7 @@
         <p:spPr>
           <a:xfrm>
             <a:off x="4206240" y="3822120"/>
-            <a:ext cx="2057040" cy="328680"/>
+            <a:ext cx="2056680" cy="328320"/>
           </a:xfrm>
           <a:prstGeom prst="rect">
             <a:avLst/>
@@ -8763,7 +9090,7 @@
         <p:spPr>
           <a:xfrm>
             <a:off x="6492240" y="3822120"/>
-            <a:ext cx="2057040" cy="328680"/>
+            <a:ext cx="2056680" cy="328320"/>
           </a:xfrm>
           <a:prstGeom prst="rect">
             <a:avLst/>
@@ -8789,6 +9116,11 @@
             <a:noAutofit/>
           </a:bodyPr>
           <a:p>
+            <a:pPr>
+              <a:lnSpc>
+                <a:spcPct val="100000"/>
+              </a:lnSpc>
+            </a:pPr>
             <a:endParaRPr b="0" lang="en-US" sz="1800" spc="-1" strike="noStrike">
               <a:solidFill>
                 <a:srgbClr val="ffffff"/>
@@ -8807,7 +9139,7 @@
         <p:spPr>
           <a:xfrm>
             <a:off x="6492240" y="3822120"/>
-            <a:ext cx="2057040" cy="328680"/>
+            <a:ext cx="2056680" cy="328320"/>
           </a:xfrm>
           <a:prstGeom prst="rect">
             <a:avLst/>
@@ -8864,7 +9196,7 @@
         <p:spPr>
           <a:xfrm>
             <a:off x="320040" y="4352400"/>
-            <a:ext cx="8503560" cy="566640"/>
+            <a:ext cx="8503200" cy="566280"/>
           </a:xfrm>
           <a:prstGeom prst="rect">
             <a:avLst/>
@@ -8890,6 +9222,11 @@
             <a:noAutofit/>
           </a:bodyPr>
           <a:p>
+            <a:pPr>
+              <a:lnSpc>
+                <a:spcPct val="100000"/>
+              </a:lnSpc>
+            </a:pPr>
             <a:endParaRPr b="0" lang="en-US" sz="1800" spc="-1" strike="noStrike">
               <a:solidFill>
                 <a:srgbClr val="ffffff"/>
@@ -8908,7 +9245,7 @@
         <p:spPr>
           <a:xfrm>
             <a:off x="457200" y="4370760"/>
-            <a:ext cx="8229240" cy="529920"/>
+            <a:ext cx="8228880" cy="529560"/>
           </a:xfrm>
           <a:prstGeom prst="rect">
             <a:avLst/>
@@ -9022,7 +9359,7 @@
         <p:spPr>
           <a:xfrm>
             <a:off x="0" y="0"/>
-            <a:ext cx="9143640" cy="959760"/>
+            <a:ext cx="9143280" cy="959400"/>
           </a:xfrm>
           <a:prstGeom prst="rect">
             <a:avLst/>
@@ -9048,6 +9385,11 @@
             <a:noAutofit/>
           </a:bodyPr>
           <a:p>
+            <a:pPr>
+              <a:lnSpc>
+                <a:spcPct val="100000"/>
+              </a:lnSpc>
+            </a:pPr>
             <a:endParaRPr b="0" lang="en-US" sz="1800" spc="-1" strike="noStrike">
               <a:solidFill>
                 <a:srgbClr val="ffffff"/>
@@ -9066,7 +9408,7 @@
         <p:spPr>
           <a:xfrm>
             <a:off x="0" y="960120"/>
-            <a:ext cx="9143640" cy="63720"/>
+            <a:ext cx="9143280" cy="63360"/>
           </a:xfrm>
           <a:prstGeom prst="rect">
             <a:avLst/>
@@ -9092,6 +9434,11 @@
             <a:noAutofit/>
           </a:bodyPr>
           <a:p>
+            <a:pPr>
+              <a:lnSpc>
+                <a:spcPct val="100000"/>
+              </a:lnSpc>
+            </a:pPr>
             <a:endParaRPr b="0" lang="en-US" sz="1800" spc="-1" strike="noStrike">
               <a:solidFill>
                 <a:srgbClr val="ffffff"/>
@@ -9110,7 +9457,7 @@
         <p:spPr>
           <a:xfrm>
             <a:off x="411480" y="0"/>
-            <a:ext cx="8320680" cy="959760"/>
+            <a:ext cx="8320320" cy="959400"/>
           </a:xfrm>
           <a:prstGeom prst="rect">
             <a:avLst/>
@@ -9167,7 +9514,7 @@
         <p:spPr>
           <a:xfrm>
             <a:off x="365760" y="1170360"/>
-            <a:ext cx="8412120" cy="749520"/>
+            <a:ext cx="8411760" cy="749160"/>
           </a:xfrm>
           <a:prstGeom prst="rect">
             <a:avLst/>
@@ -9200,6 +9547,11 @@
             <a:noAutofit/>
           </a:bodyPr>
           <a:p>
+            <a:pPr>
+              <a:lnSpc>
+                <a:spcPct val="100000"/>
+              </a:lnSpc>
+            </a:pPr>
             <a:endParaRPr b="0" lang="en-US" sz="1800" spc="-1" strike="noStrike">
               <a:solidFill>
                 <a:srgbClr val="ffffff"/>
@@ -9218,7 +9570,7 @@
         <p:spPr>
           <a:xfrm>
             <a:off x="511920" y="1188720"/>
-            <a:ext cx="8137800" cy="712800"/>
+            <a:ext cx="8137440" cy="712440"/>
           </a:xfrm>
           <a:prstGeom prst="rect">
             <a:avLst/>
@@ -9305,7 +9657,7 @@
         <p:spPr>
           <a:xfrm>
             <a:off x="365760" y="2048400"/>
-            <a:ext cx="4224240" cy="420120"/>
+            <a:ext cx="4223880" cy="419760"/>
           </a:xfrm>
           <a:prstGeom prst="rect">
             <a:avLst/>
@@ -9331,6 +9683,11 @@
             <a:noAutofit/>
           </a:bodyPr>
           <a:p>
+            <a:pPr>
+              <a:lnSpc>
+                <a:spcPct val="100000"/>
+              </a:lnSpc>
+            </a:pPr>
             <a:endParaRPr b="0" lang="en-US" sz="1800" spc="-1" strike="noStrike">
               <a:solidFill>
                 <a:srgbClr val="ffffff"/>
@@ -9349,7 +9706,7 @@
         <p:spPr>
           <a:xfrm>
             <a:off x="457200" y="2048400"/>
-            <a:ext cx="4023000" cy="420120"/>
+            <a:ext cx="4022640" cy="419760"/>
           </a:xfrm>
           <a:prstGeom prst="rect">
             <a:avLst/>
@@ -9416,7 +9773,7 @@
         <p:spPr>
           <a:xfrm>
             <a:off x="365760" y="2468880"/>
-            <a:ext cx="4224240" cy="639720"/>
+            <a:ext cx="4223880" cy="639360"/>
           </a:xfrm>
           <a:prstGeom prst="rect">
             <a:avLst/>
@@ -9442,6 +9799,11 @@
             <a:noAutofit/>
           </a:bodyPr>
           <a:p>
+            <a:pPr>
+              <a:lnSpc>
+                <a:spcPct val="100000"/>
+              </a:lnSpc>
+            </a:pPr>
             <a:endParaRPr b="0" lang="en-US" sz="1800" spc="-1" strike="noStrike">
               <a:solidFill>
                 <a:srgbClr val="ffffff"/>
@@ -9460,7 +9822,7 @@
         <p:spPr>
           <a:xfrm>
             <a:off x="493920" y="2505600"/>
-            <a:ext cx="4004640" cy="566640"/>
+            <a:ext cx="4004280" cy="566280"/>
           </a:xfrm>
           <a:prstGeom prst="rect">
             <a:avLst/>
@@ -9563,7 +9925,7 @@
         <p:spPr>
           <a:xfrm>
             <a:off x="4773240" y="2048400"/>
-            <a:ext cx="4224240" cy="420120"/>
+            <a:ext cx="4223880" cy="419760"/>
           </a:xfrm>
           <a:prstGeom prst="rect">
             <a:avLst/>
@@ -9589,6 +9951,11 @@
             <a:noAutofit/>
           </a:bodyPr>
           <a:p>
+            <a:pPr>
+              <a:lnSpc>
+                <a:spcPct val="100000"/>
+              </a:lnSpc>
+            </a:pPr>
             <a:endParaRPr b="0" lang="en-US" sz="1800" spc="-1" strike="noStrike">
               <a:solidFill>
                 <a:srgbClr val="ffffff"/>
@@ -9607,7 +9974,7 @@
         <p:spPr>
           <a:xfrm>
             <a:off x="4864680" y="2048400"/>
-            <a:ext cx="4023000" cy="420120"/>
+            <a:ext cx="4022640" cy="419760"/>
           </a:xfrm>
           <a:prstGeom prst="rect">
             <a:avLst/>
@@ -9674,7 +10041,7 @@
         <p:spPr>
           <a:xfrm>
             <a:off x="4773240" y="2468880"/>
-            <a:ext cx="4224240" cy="639720"/>
+            <a:ext cx="4223880" cy="639360"/>
           </a:xfrm>
           <a:prstGeom prst="rect">
             <a:avLst/>
@@ -9700,6 +10067,11 @@
             <a:noAutofit/>
           </a:bodyPr>
           <a:p>
+            <a:pPr>
+              <a:lnSpc>
+                <a:spcPct val="100000"/>
+              </a:lnSpc>
+            </a:pPr>
             <a:endParaRPr b="0" lang="en-US" sz="1800" spc="-1" strike="noStrike">
               <a:solidFill>
                 <a:srgbClr val="ffffff"/>
@@ -9718,7 +10090,7 @@
         <p:spPr>
           <a:xfrm>
             <a:off x="4901040" y="2505600"/>
-            <a:ext cx="4004640" cy="566640"/>
+            <a:ext cx="4004280" cy="566280"/>
           </a:xfrm>
           <a:prstGeom prst="rect">
             <a:avLst/>
@@ -9821,7 +10193,7 @@
         <p:spPr>
           <a:xfrm>
             <a:off x="365760" y="3246120"/>
-            <a:ext cx="4224240" cy="1718640"/>
+            <a:ext cx="4223880" cy="1718280"/>
           </a:xfrm>
           <a:prstGeom prst="rect">
             <a:avLst/>
@@ -9854,6 +10226,11 @@
             <a:noAutofit/>
           </a:bodyPr>
           <a:p>
+            <a:pPr>
+              <a:lnSpc>
+                <a:spcPct val="100000"/>
+              </a:lnSpc>
+            </a:pPr>
             <a:endParaRPr b="0" lang="en-US" sz="1800" spc="-1" strike="noStrike">
               <a:solidFill>
                 <a:srgbClr val="ffffff"/>
@@ -9872,7 +10249,7 @@
         <p:spPr>
           <a:xfrm>
             <a:off x="365760" y="3246120"/>
-            <a:ext cx="4224240" cy="438480"/>
+            <a:ext cx="4223880" cy="438120"/>
           </a:xfrm>
           <a:prstGeom prst="rect">
             <a:avLst/>
@@ -9898,6 +10275,11 @@
             <a:noAutofit/>
           </a:bodyPr>
           <a:p>
+            <a:pPr>
+              <a:lnSpc>
+                <a:spcPct val="100000"/>
+              </a:lnSpc>
+            </a:pPr>
             <a:endParaRPr b="0" lang="en-US" sz="1800" spc="-1" strike="noStrike">
               <a:solidFill>
                 <a:srgbClr val="ffffff"/>
@@ -9916,7 +10298,7 @@
         <p:spPr>
           <a:xfrm>
             <a:off x="457200" y="3246120"/>
-            <a:ext cx="4023000" cy="438480"/>
+            <a:ext cx="4022640" cy="438120"/>
           </a:xfrm>
           <a:prstGeom prst="rect">
             <a:avLst/>
@@ -9983,7 +10365,7 @@
         <p:spPr>
           <a:xfrm>
             <a:off x="475560" y="3721680"/>
-            <a:ext cx="4004640" cy="529920"/>
+            <a:ext cx="4004280" cy="529560"/>
           </a:xfrm>
           <a:prstGeom prst="rect">
             <a:avLst/>
@@ -10004,6 +10386,11 @@
             <a:noAutofit/>
           </a:bodyPr>
           <a:p>
+            <a:pPr>
+              <a:lnSpc>
+                <a:spcPct val="100000"/>
+              </a:lnSpc>
+            </a:pPr>
             <a:r>
               <a:rPr b="1" lang="en-US" sz="1000" spc="-1" strike="noStrike">
                 <a:solidFill>
@@ -10058,7 +10445,7 @@
         <p:spPr>
           <a:xfrm>
             <a:off x="475560" y="4288680"/>
-            <a:ext cx="4004640" cy="621360"/>
+            <a:ext cx="4004280" cy="621000"/>
           </a:xfrm>
           <a:prstGeom prst="rect">
             <a:avLst/>
@@ -10145,7 +10532,7 @@
         <p:spPr>
           <a:xfrm>
             <a:off x="4773240" y="3246120"/>
-            <a:ext cx="4224240" cy="1718640"/>
+            <a:ext cx="4223880" cy="1718280"/>
           </a:xfrm>
           <a:prstGeom prst="rect">
             <a:avLst/>
@@ -10178,6 +10565,11 @@
             <a:noAutofit/>
           </a:bodyPr>
           <a:p>
+            <a:pPr>
+              <a:lnSpc>
+                <a:spcPct val="100000"/>
+              </a:lnSpc>
+            </a:pPr>
             <a:endParaRPr b="0" lang="en-US" sz="1800" spc="-1" strike="noStrike">
               <a:solidFill>
                 <a:srgbClr val="ffffff"/>
@@ -10196,7 +10588,7 @@
         <p:spPr>
           <a:xfrm>
             <a:off x="4773240" y="3246120"/>
-            <a:ext cx="4224240" cy="438480"/>
+            <a:ext cx="4223880" cy="438120"/>
           </a:xfrm>
           <a:prstGeom prst="rect">
             <a:avLst/>
@@ -10222,6 +10614,11 @@
             <a:noAutofit/>
           </a:bodyPr>
           <a:p>
+            <a:pPr>
+              <a:lnSpc>
+                <a:spcPct val="100000"/>
+              </a:lnSpc>
+            </a:pPr>
             <a:endParaRPr b="0" lang="en-US" sz="1800" spc="-1" strike="noStrike">
               <a:solidFill>
                 <a:srgbClr val="ffffff"/>
@@ -10240,7 +10637,7 @@
         <p:spPr>
           <a:xfrm>
             <a:off x="4864680" y="3246120"/>
-            <a:ext cx="4023000" cy="438480"/>
+            <a:ext cx="4022640" cy="438120"/>
           </a:xfrm>
           <a:prstGeom prst="rect">
             <a:avLst/>
@@ -10307,7 +10704,7 @@
         <p:spPr>
           <a:xfrm>
             <a:off x="4883040" y="3721680"/>
-            <a:ext cx="4004640" cy="529920"/>
+            <a:ext cx="4004280" cy="529560"/>
           </a:xfrm>
           <a:prstGeom prst="rect">
             <a:avLst/>
@@ -10328,6 +10725,11 @@
             <a:noAutofit/>
           </a:bodyPr>
           <a:p>
+            <a:pPr>
+              <a:lnSpc>
+                <a:spcPct val="100000"/>
+              </a:lnSpc>
+            </a:pPr>
             <a:r>
               <a:rPr b="1" lang="en-US" sz="1000" spc="-1" strike="noStrike">
                 <a:solidFill>
@@ -10382,7 +10784,7 @@
         <p:spPr>
           <a:xfrm>
             <a:off x="4883040" y="4288680"/>
-            <a:ext cx="4004640" cy="621360"/>
+            <a:ext cx="4004280" cy="621000"/>
           </a:xfrm>
           <a:prstGeom prst="rect">
             <a:avLst/>
@@ -11777,7 +12179,7 @@
         <p:spPr>
           <a:xfrm>
             <a:off x="0" y="0"/>
-            <a:ext cx="9143640" cy="914040"/>
+            <a:ext cx="9143280" cy="913680"/>
           </a:xfrm>
           <a:prstGeom prst="rect">
             <a:avLst/>
@@ -11803,6 +12205,11 @@
             <a:noAutofit/>
           </a:bodyPr>
           <a:p>
+            <a:pPr>
+              <a:lnSpc>
+                <a:spcPct val="100000"/>
+              </a:lnSpc>
+            </a:pPr>
             <a:endParaRPr b="0" lang="en-US" sz="1800" spc="-1" strike="noStrike">
               <a:solidFill>
                 <a:srgbClr val="ffffff"/>
@@ -11821,7 +12228,7 @@
         <p:spPr>
           <a:xfrm>
             <a:off x="0" y="914400"/>
-            <a:ext cx="9143640" cy="54360"/>
+            <a:ext cx="9143280" cy="54000"/>
           </a:xfrm>
           <a:prstGeom prst="rect">
             <a:avLst/>
@@ -11847,6 +12254,11 @@
             <a:noAutofit/>
           </a:bodyPr>
           <a:p>
+            <a:pPr>
+              <a:lnSpc>
+                <a:spcPct val="100000"/>
+              </a:lnSpc>
+            </a:pPr>
             <a:endParaRPr b="0" lang="en-US" sz="1800" spc="-1" strike="noStrike">
               <a:solidFill>
                 <a:srgbClr val="ffffff"/>
@@ -11865,7 +12277,7 @@
         <p:spPr>
           <a:xfrm>
             <a:off x="411480" y="0"/>
-            <a:ext cx="8320680" cy="914040"/>
+            <a:ext cx="8320320" cy="913680"/>
           </a:xfrm>
           <a:prstGeom prst="rect">
             <a:avLst/>
@@ -11921,7 +12333,7 @@
         </p:nvGraphicFramePr>
         <p:xfrm>
           <a:off x="320040" y="1042560"/>
-          <a:ext cx="8503560" cy="3931560"/>
+          <a:ext cx="8503560" cy="3931200"/>
         </p:xfrm>
         <a:graphic>
           <a:graphicData uri="http://schemas.openxmlformats.org/drawingml/2006/table">
@@ -13483,7 +13895,7 @@
         <p:spPr>
           <a:xfrm>
             <a:off x="0" y="0"/>
-            <a:ext cx="9143640" cy="959760"/>
+            <a:ext cx="9143280" cy="959400"/>
           </a:xfrm>
           <a:prstGeom prst="rect">
             <a:avLst/>
@@ -13509,6 +13921,11 @@
             <a:noAutofit/>
           </a:bodyPr>
           <a:p>
+            <a:pPr>
+              <a:lnSpc>
+                <a:spcPct val="100000"/>
+              </a:lnSpc>
+            </a:pPr>
             <a:endParaRPr b="0" lang="en-US" sz="1800" spc="-1" strike="noStrike">
               <a:solidFill>
                 <a:srgbClr val="ffffff"/>
@@ -13527,7 +13944,7 @@
         <p:spPr>
           <a:xfrm>
             <a:off x="0" y="960120"/>
-            <a:ext cx="9143640" cy="63720"/>
+            <a:ext cx="9143280" cy="63360"/>
           </a:xfrm>
           <a:prstGeom prst="rect">
             <a:avLst/>
@@ -13553,6 +13970,11 @@
             <a:noAutofit/>
           </a:bodyPr>
           <a:p>
+            <a:pPr>
+              <a:lnSpc>
+                <a:spcPct val="100000"/>
+              </a:lnSpc>
+            </a:pPr>
             <a:endParaRPr b="0" lang="en-US" sz="1800" spc="-1" strike="noStrike">
               <a:solidFill>
                 <a:srgbClr val="000000"/>
@@ -13571,7 +13993,7 @@
         <p:spPr>
           <a:xfrm>
             <a:off x="411480" y="0"/>
-            <a:ext cx="8320680" cy="959760"/>
+            <a:ext cx="8320320" cy="959400"/>
           </a:xfrm>
           <a:prstGeom prst="rect">
             <a:avLst/>
@@ -13628,7 +14050,7 @@
         <p:spPr>
           <a:xfrm>
             <a:off x="365760" y="1170360"/>
-            <a:ext cx="8412120" cy="804240"/>
+            <a:ext cx="8411760" cy="803880"/>
           </a:xfrm>
           <a:prstGeom prst="rect">
             <a:avLst/>
@@ -13654,6 +14076,11 @@
             <a:noAutofit/>
           </a:bodyPr>
           <a:p>
+            <a:pPr>
+              <a:lnSpc>
+                <a:spcPct val="100000"/>
+              </a:lnSpc>
+            </a:pPr>
             <a:endParaRPr b="0" lang="en-US" sz="1800" spc="-1" strike="noStrike">
               <a:solidFill>
                 <a:srgbClr val="ffffff"/>
@@ -13672,7 +14099,7 @@
         <p:spPr>
           <a:xfrm>
             <a:off x="511920" y="1188720"/>
-            <a:ext cx="8137800" cy="749520"/>
+            <a:ext cx="8137440" cy="749160"/>
           </a:xfrm>
           <a:prstGeom prst="rect">
             <a:avLst/>
@@ -13749,7 +14176,7 @@
         <p:spPr>
           <a:xfrm>
             <a:off x="320040" y="2103120"/>
-            <a:ext cx="1627200" cy="1005480"/>
+            <a:ext cx="1626840" cy="1005120"/>
           </a:xfrm>
           <a:prstGeom prst="rect">
             <a:avLst/>
@@ -13775,6 +14202,11 @@
             <a:noAutofit/>
           </a:bodyPr>
           <a:p>
+            <a:pPr>
+              <a:lnSpc>
+                <a:spcPct val="100000"/>
+              </a:lnSpc>
+            </a:pPr>
             <a:endParaRPr b="0" lang="en-US" sz="1800" spc="-1" strike="noStrike">
               <a:solidFill>
                 <a:srgbClr val="ffffff"/>
@@ -13793,7 +14225,7 @@
         <p:spPr>
           <a:xfrm>
             <a:off x="320040" y="2121480"/>
-            <a:ext cx="1627200" cy="420120"/>
+            <a:ext cx="1626840" cy="419760"/>
           </a:xfrm>
           <a:prstGeom prst="rect">
             <a:avLst/>
@@ -13849,7 +14281,7 @@
         <p:spPr>
           <a:xfrm>
             <a:off x="320040" y="2560320"/>
-            <a:ext cx="1627200" cy="511560"/>
+            <a:ext cx="1626840" cy="511200"/>
           </a:xfrm>
           <a:prstGeom prst="rect">
             <a:avLst/>
@@ -13932,7 +14364,7 @@
         <p:spPr>
           <a:xfrm>
             <a:off x="2057400" y="2103120"/>
-            <a:ext cx="1627200" cy="1005480"/>
+            <a:ext cx="1626840" cy="1005120"/>
           </a:xfrm>
           <a:prstGeom prst="rect">
             <a:avLst/>
@@ -13958,6 +14390,11 @@
             <a:noAutofit/>
           </a:bodyPr>
           <a:p>
+            <a:pPr>
+              <a:lnSpc>
+                <a:spcPct val="100000"/>
+              </a:lnSpc>
+            </a:pPr>
             <a:endParaRPr b="0" lang="en-US" sz="1800" spc="-1" strike="noStrike">
               <a:solidFill>
                 <a:srgbClr val="ffffff"/>
@@ -13976,7 +14413,7 @@
         <p:spPr>
           <a:xfrm>
             <a:off x="2057400" y="2121480"/>
-            <a:ext cx="1627200" cy="420120"/>
+            <a:ext cx="1626840" cy="419760"/>
           </a:xfrm>
           <a:prstGeom prst="rect">
             <a:avLst/>
@@ -14032,7 +14469,7 @@
         <p:spPr>
           <a:xfrm>
             <a:off x="2057400" y="2560320"/>
-            <a:ext cx="1627200" cy="511560"/>
+            <a:ext cx="1626840" cy="511200"/>
           </a:xfrm>
           <a:prstGeom prst="rect">
             <a:avLst/>
@@ -14115,7 +14552,7 @@
         <p:spPr>
           <a:xfrm>
             <a:off x="3794760" y="2103120"/>
-            <a:ext cx="1627200" cy="1005480"/>
+            <a:ext cx="1626840" cy="1005120"/>
           </a:xfrm>
           <a:prstGeom prst="rect">
             <a:avLst/>
@@ -14141,6 +14578,11 @@
             <a:noAutofit/>
           </a:bodyPr>
           <a:p>
+            <a:pPr>
+              <a:lnSpc>
+                <a:spcPct val="100000"/>
+              </a:lnSpc>
+            </a:pPr>
             <a:endParaRPr b="0" lang="en-US" sz="1800" spc="-1" strike="noStrike">
               <a:solidFill>
                 <a:srgbClr val="ffffff"/>
@@ -14159,7 +14601,7 @@
         <p:spPr>
           <a:xfrm>
             <a:off x="3794760" y="2121480"/>
-            <a:ext cx="1627200" cy="420120"/>
+            <a:ext cx="1626840" cy="419760"/>
           </a:xfrm>
           <a:prstGeom prst="rect">
             <a:avLst/>
@@ -14215,7 +14657,7 @@
         <p:spPr>
           <a:xfrm>
             <a:off x="3794760" y="2560320"/>
-            <a:ext cx="1627200" cy="511560"/>
+            <a:ext cx="1626840" cy="511200"/>
           </a:xfrm>
           <a:prstGeom prst="rect">
             <a:avLst/>
@@ -14298,7 +14740,7 @@
         <p:spPr>
           <a:xfrm>
             <a:off x="5532120" y="2103120"/>
-            <a:ext cx="1627200" cy="1005480"/>
+            <a:ext cx="1626840" cy="1005120"/>
           </a:xfrm>
           <a:prstGeom prst="rect">
             <a:avLst/>
@@ -14324,6 +14766,11 @@
             <a:noAutofit/>
           </a:bodyPr>
           <a:p>
+            <a:pPr>
+              <a:lnSpc>
+                <a:spcPct val="100000"/>
+              </a:lnSpc>
+            </a:pPr>
             <a:endParaRPr b="0" lang="en-US" sz="1800" spc="-1" strike="noStrike">
               <a:solidFill>
                 <a:srgbClr val="ffffff"/>
@@ -14342,7 +14789,7 @@
         <p:spPr>
           <a:xfrm>
             <a:off x="5532120" y="2121480"/>
-            <a:ext cx="1627200" cy="420120"/>
+            <a:ext cx="1626840" cy="419760"/>
           </a:xfrm>
           <a:prstGeom prst="rect">
             <a:avLst/>
@@ -14398,7 +14845,7 @@
         <p:spPr>
           <a:xfrm>
             <a:off x="5532120" y="2560320"/>
-            <a:ext cx="1627200" cy="511560"/>
+            <a:ext cx="1626840" cy="511200"/>
           </a:xfrm>
           <a:prstGeom prst="rect">
             <a:avLst/>
@@ -14481,7 +14928,7 @@
         <p:spPr>
           <a:xfrm>
             <a:off x="7269480" y="2103120"/>
-            <a:ext cx="1627200" cy="1005480"/>
+            <a:ext cx="1626840" cy="1005120"/>
           </a:xfrm>
           <a:prstGeom prst="rect">
             <a:avLst/>
@@ -14507,6 +14954,11 @@
             <a:noAutofit/>
           </a:bodyPr>
           <a:p>
+            <a:pPr>
+              <a:lnSpc>
+                <a:spcPct val="100000"/>
+              </a:lnSpc>
+            </a:pPr>
             <a:endParaRPr b="0" lang="en-US" sz="1800" spc="-1" strike="noStrike">
               <a:solidFill>
                 <a:srgbClr val="ffffff"/>
@@ -14525,7 +14977,7 @@
         <p:spPr>
           <a:xfrm>
             <a:off x="7269480" y="2121480"/>
-            <a:ext cx="1627200" cy="420120"/>
+            <a:ext cx="1626840" cy="419760"/>
           </a:xfrm>
           <a:prstGeom prst="rect">
             <a:avLst/>
@@ -14581,7 +15033,7 @@
         <p:spPr>
           <a:xfrm>
             <a:off x="7269480" y="2560320"/>
-            <a:ext cx="1627200" cy="511560"/>
+            <a:ext cx="1626840" cy="511200"/>
           </a:xfrm>
           <a:prstGeom prst="rect">
             <a:avLst/>
@@ -14664,7 +15116,7 @@
         <p:spPr>
           <a:xfrm>
             <a:off x="365760" y="3255120"/>
-            <a:ext cx="4251600" cy="328680"/>
+            <a:ext cx="4251240" cy="328320"/>
           </a:xfrm>
           <a:prstGeom prst="rect">
             <a:avLst/>
@@ -14721,7 +15173,7 @@
         <p:spPr>
           <a:xfrm>
             <a:off x="365760" y="3657600"/>
-            <a:ext cx="4224240" cy="365400"/>
+            <a:ext cx="4223880" cy="365040"/>
           </a:xfrm>
           <a:prstGeom prst="rect">
             <a:avLst/>
@@ -14747,6 +15199,11 @@
             <a:noAutofit/>
           </a:bodyPr>
           <a:p>
+            <a:pPr>
+              <a:lnSpc>
+                <a:spcPct val="100000"/>
+              </a:lnSpc>
+            </a:pPr>
             <a:endParaRPr b="0" lang="en-US" sz="1800" spc="-1" strike="noStrike">
               <a:solidFill>
                 <a:srgbClr val="ffffff"/>
@@ -14765,7 +15222,7 @@
         <p:spPr>
           <a:xfrm>
             <a:off x="365760" y="3657600"/>
-            <a:ext cx="91080" cy="365400"/>
+            <a:ext cx="90720" cy="365040"/>
           </a:xfrm>
           <a:prstGeom prst="rect">
             <a:avLst/>
@@ -14791,6 +15248,11 @@
             <a:noAutofit/>
           </a:bodyPr>
           <a:p>
+            <a:pPr>
+              <a:lnSpc>
+                <a:spcPct val="100000"/>
+              </a:lnSpc>
+            </a:pPr>
             <a:endParaRPr b="0" lang="en-US" sz="1800" spc="-1" strike="noStrike">
               <a:solidFill>
                 <a:srgbClr val="ffffff"/>
@@ -14809,7 +15271,7 @@
         <p:spPr>
           <a:xfrm>
             <a:off x="548640" y="3675960"/>
-            <a:ext cx="3840120" cy="328680"/>
+            <a:ext cx="3839760" cy="328320"/>
           </a:xfrm>
           <a:prstGeom prst="rect">
             <a:avLst/>
@@ -14866,7 +15328,7 @@
         <p:spPr>
           <a:xfrm>
             <a:off x="365760" y="4078080"/>
-            <a:ext cx="4224240" cy="365400"/>
+            <a:ext cx="4223880" cy="365040"/>
           </a:xfrm>
           <a:prstGeom prst="rect">
             <a:avLst/>
@@ -14892,6 +15354,11 @@
             <a:noAutofit/>
           </a:bodyPr>
           <a:p>
+            <a:pPr>
+              <a:lnSpc>
+                <a:spcPct val="100000"/>
+              </a:lnSpc>
+            </a:pPr>
             <a:endParaRPr b="0" lang="en-US" sz="1800" spc="-1" strike="noStrike">
               <a:solidFill>
                 <a:srgbClr val="ffffff"/>
@@ -14910,7 +15377,7 @@
         <p:spPr>
           <a:xfrm>
             <a:off x="365760" y="4078080"/>
-            <a:ext cx="91080" cy="365400"/>
+            <a:ext cx="90720" cy="365040"/>
           </a:xfrm>
           <a:prstGeom prst="rect">
             <a:avLst/>
@@ -14936,6 +15403,11 @@
             <a:noAutofit/>
           </a:bodyPr>
           <a:p>
+            <a:pPr>
+              <a:lnSpc>
+                <a:spcPct val="100000"/>
+              </a:lnSpc>
+            </a:pPr>
             <a:endParaRPr b="0" lang="en-US" sz="1800" spc="-1" strike="noStrike">
               <a:solidFill>
                 <a:srgbClr val="ffffff"/>
@@ -14954,7 +15426,7 @@
         <p:spPr>
           <a:xfrm>
             <a:off x="548640" y="4096440"/>
-            <a:ext cx="3840120" cy="328680"/>
+            <a:ext cx="3839760" cy="328320"/>
           </a:xfrm>
           <a:prstGeom prst="rect">
             <a:avLst/>
@@ -15011,7 +15483,7 @@
         <p:spPr>
           <a:xfrm>
             <a:off x="365760" y="4498920"/>
-            <a:ext cx="4224240" cy="365400"/>
+            <a:ext cx="4223880" cy="365040"/>
           </a:xfrm>
           <a:prstGeom prst="rect">
             <a:avLst/>
@@ -15037,6 +15509,11 @@
             <a:noAutofit/>
           </a:bodyPr>
           <a:p>
+            <a:pPr>
+              <a:lnSpc>
+                <a:spcPct val="100000"/>
+              </a:lnSpc>
+            </a:pPr>
             <a:endParaRPr b="0" lang="en-US" sz="1800" spc="-1" strike="noStrike">
               <a:solidFill>
                 <a:srgbClr val="ffffff"/>
@@ -15055,7 +15532,7 @@
         <p:spPr>
           <a:xfrm>
             <a:off x="365760" y="4498920"/>
-            <a:ext cx="91080" cy="365400"/>
+            <a:ext cx="90720" cy="365040"/>
           </a:xfrm>
           <a:prstGeom prst="rect">
             <a:avLst/>
@@ -15081,6 +15558,11 @@
             <a:noAutofit/>
           </a:bodyPr>
           <a:p>
+            <a:pPr>
+              <a:lnSpc>
+                <a:spcPct val="100000"/>
+              </a:lnSpc>
+            </a:pPr>
             <a:endParaRPr b="0" lang="en-US" sz="1800" spc="-1" strike="noStrike">
               <a:solidFill>
                 <a:srgbClr val="ffffff"/>
@@ -15099,7 +15581,7 @@
         <p:spPr>
           <a:xfrm>
             <a:off x="548640" y="4517280"/>
-            <a:ext cx="3840120" cy="328680"/>
+            <a:ext cx="3839760" cy="328320"/>
           </a:xfrm>
           <a:prstGeom prst="rect">
             <a:avLst/>
@@ -15156,7 +15638,7 @@
         <p:spPr>
           <a:xfrm>
             <a:off x="4736520" y="3255120"/>
-            <a:ext cx="4251600" cy="328680"/>
+            <a:ext cx="4251240" cy="328320"/>
           </a:xfrm>
           <a:prstGeom prst="rect">
             <a:avLst/>
@@ -15213,7 +15695,7 @@
         <p:spPr>
           <a:xfrm>
             <a:off x="4736520" y="3657600"/>
-            <a:ext cx="4224240" cy="365400"/>
+            <a:ext cx="4223880" cy="365040"/>
           </a:xfrm>
           <a:prstGeom prst="rect">
             <a:avLst/>
@@ -15239,6 +15721,11 @@
             <a:noAutofit/>
           </a:bodyPr>
           <a:p>
+            <a:pPr>
+              <a:lnSpc>
+                <a:spcPct val="100000"/>
+              </a:lnSpc>
+            </a:pPr>
             <a:endParaRPr b="0" lang="en-US" sz="1800" spc="-1" strike="noStrike">
               <a:solidFill>
                 <a:srgbClr val="ffffff"/>
@@ -15257,7 +15744,7 @@
         <p:spPr>
           <a:xfrm>
             <a:off x="4736520" y="3657600"/>
-            <a:ext cx="91080" cy="365400"/>
+            <a:ext cx="90720" cy="365040"/>
           </a:xfrm>
           <a:prstGeom prst="rect">
             <a:avLst/>
@@ -15283,6 +15770,11 @@
             <a:noAutofit/>
           </a:bodyPr>
           <a:p>
+            <a:pPr>
+              <a:lnSpc>
+                <a:spcPct val="100000"/>
+              </a:lnSpc>
+            </a:pPr>
             <a:endParaRPr b="0" lang="en-US" sz="1800" spc="-1" strike="noStrike">
               <a:solidFill>
                 <a:srgbClr val="ffffff"/>
@@ -15301,7 +15793,7 @@
         <p:spPr>
           <a:xfrm>
             <a:off x="4919400" y="3675960"/>
-            <a:ext cx="3840120" cy="328680"/>
+            <a:ext cx="3839760" cy="328320"/>
           </a:xfrm>
           <a:prstGeom prst="rect">
             <a:avLst/>
@@ -15358,7 +15850,7 @@
         <p:spPr>
           <a:xfrm>
             <a:off x="4736520" y="4078080"/>
-            <a:ext cx="4224240" cy="365400"/>
+            <a:ext cx="4223880" cy="365040"/>
           </a:xfrm>
           <a:prstGeom prst="rect">
             <a:avLst/>
@@ -15384,6 +15876,11 @@
             <a:noAutofit/>
           </a:bodyPr>
           <a:p>
+            <a:pPr>
+              <a:lnSpc>
+                <a:spcPct val="100000"/>
+              </a:lnSpc>
+            </a:pPr>
             <a:endParaRPr b="0" lang="en-US" sz="1800" spc="-1" strike="noStrike">
               <a:solidFill>
                 <a:srgbClr val="ffffff"/>
@@ -15402,7 +15899,7 @@
         <p:spPr>
           <a:xfrm>
             <a:off x="4736520" y="4078080"/>
-            <a:ext cx="91080" cy="365400"/>
+            <a:ext cx="90720" cy="365040"/>
           </a:xfrm>
           <a:prstGeom prst="rect">
             <a:avLst/>
@@ -15428,6 +15925,11 @@
             <a:noAutofit/>
           </a:bodyPr>
           <a:p>
+            <a:pPr>
+              <a:lnSpc>
+                <a:spcPct val="100000"/>
+              </a:lnSpc>
+            </a:pPr>
             <a:endParaRPr b="0" lang="en-US" sz="1800" spc="-1" strike="noStrike">
               <a:solidFill>
                 <a:srgbClr val="ffffff"/>
@@ -15446,7 +15948,7 @@
         <p:spPr>
           <a:xfrm>
             <a:off x="4919400" y="4096440"/>
-            <a:ext cx="3840120" cy="328680"/>
+            <a:ext cx="3839760" cy="328320"/>
           </a:xfrm>
           <a:prstGeom prst="rect">
             <a:avLst/>
@@ -15503,7 +16005,7 @@
         <p:spPr>
           <a:xfrm>
             <a:off x="4736520" y="4498920"/>
-            <a:ext cx="4224240" cy="365400"/>
+            <a:ext cx="4223880" cy="365040"/>
           </a:xfrm>
           <a:prstGeom prst="rect">
             <a:avLst/>
@@ -15529,6 +16031,11 @@
             <a:noAutofit/>
           </a:bodyPr>
           <a:p>
+            <a:pPr>
+              <a:lnSpc>
+                <a:spcPct val="100000"/>
+              </a:lnSpc>
+            </a:pPr>
             <a:endParaRPr b="0" lang="en-US" sz="1800" spc="-1" strike="noStrike">
               <a:solidFill>
                 <a:srgbClr val="ffffff"/>
@@ -15547,7 +16054,7 @@
         <p:spPr>
           <a:xfrm>
             <a:off x="4736520" y="4498920"/>
-            <a:ext cx="91080" cy="365400"/>
+            <a:ext cx="90720" cy="365040"/>
           </a:xfrm>
           <a:prstGeom prst="rect">
             <a:avLst/>
@@ -15573,6 +16080,11 @@
             <a:noAutofit/>
           </a:bodyPr>
           <a:p>
+            <a:pPr>
+              <a:lnSpc>
+                <a:spcPct val="100000"/>
+              </a:lnSpc>
+            </a:pPr>
             <a:endParaRPr b="0" lang="en-US" sz="1800" spc="-1" strike="noStrike">
               <a:solidFill>
                 <a:srgbClr val="ffffff"/>
@@ -15591,7 +16103,7 @@
         <p:spPr>
           <a:xfrm>
             <a:off x="4919400" y="4517280"/>
-            <a:ext cx="3840120" cy="328680"/>
+            <a:ext cx="3839760" cy="328320"/>
           </a:xfrm>
           <a:prstGeom prst="rect">
             <a:avLst/>
@@ -16956,7 +17468,7 @@
         <p:spPr>
           <a:xfrm>
             <a:off x="0" y="0"/>
-            <a:ext cx="9143640" cy="914040"/>
+            <a:ext cx="9143280" cy="913680"/>
           </a:xfrm>
           <a:prstGeom prst="rect">
             <a:avLst/>
@@ -16982,6 +17494,11 @@
             <a:noAutofit/>
           </a:bodyPr>
           <a:p>
+            <a:pPr>
+              <a:lnSpc>
+                <a:spcPct val="100000"/>
+              </a:lnSpc>
+            </a:pPr>
             <a:endParaRPr b="0" lang="en-US" sz="1800" spc="-1" strike="noStrike">
               <a:solidFill>
                 <a:srgbClr val="ffffff"/>
@@ -17000,7 +17517,7 @@
         <p:spPr>
           <a:xfrm>
             <a:off x="0" y="914400"/>
-            <a:ext cx="9143640" cy="54360"/>
+            <a:ext cx="9143280" cy="54000"/>
           </a:xfrm>
           <a:prstGeom prst="rect">
             <a:avLst/>
@@ -17026,6 +17543,11 @@
             <a:noAutofit/>
           </a:bodyPr>
           <a:p>
+            <a:pPr>
+              <a:lnSpc>
+                <a:spcPct val="100000"/>
+              </a:lnSpc>
+            </a:pPr>
             <a:endParaRPr b="0" lang="en-US" sz="1800" spc="-1" strike="noStrike">
               <a:solidFill>
                 <a:srgbClr val="000000"/>
@@ -17044,7 +17566,7 @@
         <p:spPr>
           <a:xfrm>
             <a:off x="411480" y="0"/>
-            <a:ext cx="8320680" cy="914040"/>
+            <a:ext cx="8320320" cy="913680"/>
           </a:xfrm>
           <a:prstGeom prst="rect">
             <a:avLst/>
@@ -17101,7 +17623,7 @@
         <p:spPr>
           <a:xfrm>
             <a:off x="274320" y="1060560"/>
-            <a:ext cx="4260600" cy="1810080"/>
+            <a:ext cx="4260240" cy="1809720"/>
           </a:xfrm>
           <a:prstGeom prst="rect">
             <a:avLst/>
@@ -17134,6 +17656,11 @@
             <a:noAutofit/>
           </a:bodyPr>
           <a:p>
+            <a:pPr>
+              <a:lnSpc>
+                <a:spcPct val="100000"/>
+              </a:lnSpc>
+            </a:pPr>
             <a:endParaRPr b="0" lang="en-US" sz="1800" spc="-1" strike="noStrike">
               <a:solidFill>
                 <a:srgbClr val="ffffff"/>
@@ -17152,7 +17679,7 @@
         <p:spPr>
           <a:xfrm>
             <a:off x="274320" y="1060560"/>
-            <a:ext cx="4260600" cy="475200"/>
+            <a:ext cx="4260240" cy="474840"/>
           </a:xfrm>
           <a:prstGeom prst="rect">
             <a:avLst/>
@@ -17178,6 +17705,11 @@
             <a:noAutofit/>
           </a:bodyPr>
           <a:p>
+            <a:pPr>
+              <a:lnSpc>
+                <a:spcPct val="100000"/>
+              </a:lnSpc>
+            </a:pPr>
             <a:endParaRPr b="0" lang="en-US" sz="1800" spc="-1" strike="noStrike">
               <a:solidFill>
                 <a:srgbClr val="ffffff"/>
@@ -17196,7 +17728,7 @@
         <p:spPr>
           <a:xfrm>
             <a:off x="384120" y="1152000"/>
-            <a:ext cx="347040" cy="347040"/>
+            <a:ext cx="346680" cy="346680"/>
           </a:xfrm>
           <a:prstGeom prst="ellipse">
             <a:avLst/>
@@ -17222,6 +17754,11 @@
             <a:noAutofit/>
           </a:bodyPr>
           <a:p>
+            <a:pPr>
+              <a:lnSpc>
+                <a:spcPct val="100000"/>
+              </a:lnSpc>
+            </a:pPr>
             <a:endParaRPr b="0" lang="en-US" sz="1800" spc="-1" strike="noStrike">
               <a:solidFill>
                 <a:srgbClr val="ffffff"/>
@@ -17240,7 +17777,7 @@
         <p:spPr>
           <a:xfrm>
             <a:off x="384120" y="1152000"/>
-            <a:ext cx="347040" cy="347040"/>
+            <a:ext cx="346680" cy="346680"/>
           </a:xfrm>
           <a:prstGeom prst="rect">
             <a:avLst/>
@@ -17296,7 +17833,7 @@
         <p:spPr>
           <a:xfrm>
             <a:off x="822960" y="1152000"/>
-            <a:ext cx="3611520" cy="347040"/>
+            <a:ext cx="3611160" cy="346680"/>
           </a:xfrm>
           <a:prstGeom prst="rect">
             <a:avLst/>
@@ -17363,7 +17900,7 @@
         <p:spPr>
           <a:xfrm>
             <a:off x="384120" y="1572840"/>
-            <a:ext cx="4041360" cy="1243080"/>
+            <a:ext cx="4041000" cy="1242720"/>
           </a:xfrm>
           <a:prstGeom prst="rect">
             <a:avLst/>
@@ -17420,7 +17957,7 @@
         <p:spPr>
           <a:xfrm>
             <a:off x="4736520" y="1060560"/>
-            <a:ext cx="4260600" cy="1810080"/>
+            <a:ext cx="4260240" cy="1809720"/>
           </a:xfrm>
           <a:prstGeom prst="rect">
             <a:avLst/>
@@ -17453,6 +17990,11 @@
             <a:noAutofit/>
           </a:bodyPr>
           <a:p>
+            <a:pPr>
+              <a:lnSpc>
+                <a:spcPct val="100000"/>
+              </a:lnSpc>
+            </a:pPr>
             <a:endParaRPr b="0" lang="en-US" sz="1800" spc="-1" strike="noStrike">
               <a:solidFill>
                 <a:srgbClr val="ffffff"/>
@@ -17471,7 +18013,7 @@
         <p:spPr>
           <a:xfrm>
             <a:off x="4736520" y="1060560"/>
-            <a:ext cx="4260600" cy="475200"/>
+            <a:ext cx="4260240" cy="474840"/>
           </a:xfrm>
           <a:prstGeom prst="rect">
             <a:avLst/>
@@ -17497,6 +18039,11 @@
             <a:noAutofit/>
           </a:bodyPr>
           <a:p>
+            <a:pPr>
+              <a:lnSpc>
+                <a:spcPct val="100000"/>
+              </a:lnSpc>
+            </a:pPr>
             <a:endParaRPr b="0" lang="en-US" sz="1800" spc="-1" strike="noStrike">
               <a:solidFill>
                 <a:srgbClr val="ffffff"/>
@@ -17515,7 +18062,7 @@
         <p:spPr>
           <a:xfrm>
             <a:off x="4846320" y="1152000"/>
-            <a:ext cx="347040" cy="347040"/>
+            <a:ext cx="346680" cy="346680"/>
           </a:xfrm>
           <a:prstGeom prst="ellipse">
             <a:avLst/>
@@ -17541,6 +18088,11 @@
             <a:noAutofit/>
           </a:bodyPr>
           <a:p>
+            <a:pPr>
+              <a:lnSpc>
+                <a:spcPct val="100000"/>
+              </a:lnSpc>
+            </a:pPr>
             <a:endParaRPr b="0" lang="en-US" sz="1800" spc="-1" strike="noStrike">
               <a:solidFill>
                 <a:srgbClr val="ffffff"/>
@@ -17559,7 +18111,7 @@
         <p:spPr>
           <a:xfrm>
             <a:off x="4846320" y="1152000"/>
-            <a:ext cx="347040" cy="347040"/>
+            <a:ext cx="346680" cy="346680"/>
           </a:xfrm>
           <a:prstGeom prst="rect">
             <a:avLst/>
@@ -17615,7 +18167,7 @@
         <p:spPr>
           <a:xfrm>
             <a:off x="5285160" y="1152000"/>
-            <a:ext cx="3611520" cy="347040"/>
+            <a:ext cx="3611160" cy="346680"/>
           </a:xfrm>
           <a:prstGeom prst="rect">
             <a:avLst/>
@@ -17682,7 +18234,7 @@
         <p:spPr>
           <a:xfrm>
             <a:off x="4846320" y="1572840"/>
-            <a:ext cx="4041360" cy="1243080"/>
+            <a:ext cx="4041000" cy="1242720"/>
           </a:xfrm>
           <a:prstGeom prst="rect">
             <a:avLst/>
@@ -17739,7 +18291,7 @@
         <p:spPr>
           <a:xfrm>
             <a:off x="274320" y="3017520"/>
-            <a:ext cx="4260600" cy="1810080"/>
+            <a:ext cx="4260240" cy="1809720"/>
           </a:xfrm>
           <a:prstGeom prst="rect">
             <a:avLst/>
@@ -17772,6 +18324,11 @@
             <a:noAutofit/>
           </a:bodyPr>
           <a:p>
+            <a:pPr>
+              <a:lnSpc>
+                <a:spcPct val="100000"/>
+              </a:lnSpc>
+            </a:pPr>
             <a:endParaRPr b="0" lang="en-US" sz="1800" spc="-1" strike="noStrike">
               <a:solidFill>
                 <a:srgbClr val="ffffff"/>
@@ -17790,7 +18347,7 @@
         <p:spPr>
           <a:xfrm>
             <a:off x="274320" y="3017520"/>
-            <a:ext cx="4260600" cy="475200"/>
+            <a:ext cx="4260240" cy="474840"/>
           </a:xfrm>
           <a:prstGeom prst="rect">
             <a:avLst/>
@@ -17816,6 +18373,11 @@
             <a:noAutofit/>
           </a:bodyPr>
           <a:p>
+            <a:pPr>
+              <a:lnSpc>
+                <a:spcPct val="100000"/>
+              </a:lnSpc>
+            </a:pPr>
             <a:endParaRPr b="0" lang="en-US" sz="1800" spc="-1" strike="noStrike">
               <a:solidFill>
                 <a:srgbClr val="ffffff"/>
@@ -17834,7 +18396,7 @@
         <p:spPr>
           <a:xfrm>
             <a:off x="384120" y="3108960"/>
-            <a:ext cx="347040" cy="347040"/>
+            <a:ext cx="346680" cy="346680"/>
           </a:xfrm>
           <a:prstGeom prst="ellipse">
             <a:avLst/>
@@ -17860,6 +18422,11 @@
             <a:noAutofit/>
           </a:bodyPr>
           <a:p>
+            <a:pPr>
+              <a:lnSpc>
+                <a:spcPct val="100000"/>
+              </a:lnSpc>
+            </a:pPr>
             <a:endParaRPr b="0" lang="en-US" sz="1800" spc="-1" strike="noStrike">
               <a:solidFill>
                 <a:srgbClr val="ffffff"/>
@@ -17878,7 +18445,7 @@
         <p:spPr>
           <a:xfrm>
             <a:off x="384120" y="3108960"/>
-            <a:ext cx="347040" cy="347040"/>
+            <a:ext cx="346680" cy="346680"/>
           </a:xfrm>
           <a:prstGeom prst="rect">
             <a:avLst/>
@@ -17934,7 +18501,7 @@
         <p:spPr>
           <a:xfrm>
             <a:off x="822960" y="3108960"/>
-            <a:ext cx="3611520" cy="347040"/>
+            <a:ext cx="3611160" cy="346680"/>
           </a:xfrm>
           <a:prstGeom prst="rect">
             <a:avLst/>
@@ -18001,7 +18568,7 @@
         <p:spPr>
           <a:xfrm>
             <a:off x="384120" y="3529440"/>
-            <a:ext cx="4041360" cy="1243080"/>
+            <a:ext cx="4041000" cy="1242720"/>
           </a:xfrm>
           <a:prstGeom prst="rect">
             <a:avLst/>
@@ -18058,7 +18625,7 @@
         <p:spPr>
           <a:xfrm>
             <a:off x="4736520" y="3017520"/>
-            <a:ext cx="4260600" cy="1810080"/>
+            <a:ext cx="4260240" cy="1809720"/>
           </a:xfrm>
           <a:prstGeom prst="rect">
             <a:avLst/>
@@ -18091,6 +18658,11 @@
             <a:noAutofit/>
           </a:bodyPr>
           <a:p>
+            <a:pPr>
+              <a:lnSpc>
+                <a:spcPct val="100000"/>
+              </a:lnSpc>
+            </a:pPr>
             <a:endParaRPr b="0" lang="en-US" sz="1800" spc="-1" strike="noStrike">
               <a:solidFill>
                 <a:srgbClr val="ffffff"/>
@@ -18109,7 +18681,7 @@
         <p:spPr>
           <a:xfrm>
             <a:off x="4736520" y="3017520"/>
-            <a:ext cx="4260600" cy="475200"/>
+            <a:ext cx="4260240" cy="474840"/>
           </a:xfrm>
           <a:prstGeom prst="rect">
             <a:avLst/>
@@ -18135,6 +18707,11 @@
             <a:noAutofit/>
           </a:bodyPr>
           <a:p>
+            <a:pPr>
+              <a:lnSpc>
+                <a:spcPct val="100000"/>
+              </a:lnSpc>
+            </a:pPr>
             <a:endParaRPr b="0" lang="en-US" sz="1800" spc="-1" strike="noStrike">
               <a:solidFill>
                 <a:srgbClr val="ffffff"/>
@@ -18153,7 +18730,7 @@
         <p:spPr>
           <a:xfrm>
             <a:off x="4846320" y="3108960"/>
-            <a:ext cx="347040" cy="347040"/>
+            <a:ext cx="346680" cy="346680"/>
           </a:xfrm>
           <a:prstGeom prst="ellipse">
             <a:avLst/>
@@ -18179,6 +18756,11 @@
             <a:noAutofit/>
           </a:bodyPr>
           <a:p>
+            <a:pPr>
+              <a:lnSpc>
+                <a:spcPct val="100000"/>
+              </a:lnSpc>
+            </a:pPr>
             <a:endParaRPr b="0" lang="en-US" sz="1800" spc="-1" strike="noStrike">
               <a:solidFill>
                 <a:srgbClr val="000000"/>
@@ -18197,7 +18779,7 @@
         <p:spPr>
           <a:xfrm>
             <a:off x="4846320" y="3108960"/>
-            <a:ext cx="347040" cy="347040"/>
+            <a:ext cx="346680" cy="346680"/>
           </a:xfrm>
           <a:prstGeom prst="rect">
             <a:avLst/>
@@ -18253,7 +18835,7 @@
         <p:spPr>
           <a:xfrm>
             <a:off x="5285160" y="3108960"/>
-            <a:ext cx="3611520" cy="347040"/>
+            <a:ext cx="3611160" cy="346680"/>
           </a:xfrm>
           <a:prstGeom prst="rect">
             <a:avLst/>
@@ -18320,7 +18902,7 @@
         <p:spPr>
           <a:xfrm>
             <a:off x="4846320" y="3529440"/>
-            <a:ext cx="4041360" cy="1243080"/>
+            <a:ext cx="4041000" cy="1242720"/>
           </a:xfrm>
           <a:prstGeom prst="rect">
             <a:avLst/>
@@ -18414,7 +18996,7 @@
         <p:spPr>
           <a:xfrm>
             <a:off x="0" y="0"/>
-            <a:ext cx="9143640" cy="959760"/>
+            <a:ext cx="9143280" cy="959400"/>
           </a:xfrm>
           <a:prstGeom prst="rect">
             <a:avLst/>
@@ -18440,6 +19022,11 @@
             <a:noAutofit/>
           </a:bodyPr>
           <a:p>
+            <a:pPr>
+              <a:lnSpc>
+                <a:spcPct val="100000"/>
+              </a:lnSpc>
+            </a:pPr>
             <a:endParaRPr b="0" lang="en-US" sz="1800" spc="-1" strike="noStrike">
               <a:solidFill>
                 <a:srgbClr val="ffffff"/>
@@ -18458,7 +19045,7 @@
         <p:spPr>
           <a:xfrm>
             <a:off x="0" y="960120"/>
-            <a:ext cx="9143640" cy="63720"/>
+            <a:ext cx="9143280" cy="63360"/>
           </a:xfrm>
           <a:prstGeom prst="rect">
             <a:avLst/>
@@ -18484,6 +19071,11 @@
             <a:noAutofit/>
           </a:bodyPr>
           <a:p>
+            <a:pPr>
+              <a:lnSpc>
+                <a:spcPct val="100000"/>
+              </a:lnSpc>
+            </a:pPr>
             <a:endParaRPr b="0" lang="en-US" sz="1800" spc="-1" strike="noStrike">
               <a:solidFill>
                 <a:srgbClr val="ffffff"/>
@@ -18502,7 +19094,7 @@
         <p:spPr>
           <a:xfrm>
             <a:off x="411480" y="0"/>
-            <a:ext cx="8320680" cy="959760"/>
+            <a:ext cx="8320320" cy="959400"/>
           </a:xfrm>
           <a:prstGeom prst="rect">
             <a:avLst/>
@@ -18559,7 +19151,7 @@
         <p:spPr>
           <a:xfrm>
             <a:off x="255960" y="1170360"/>
-            <a:ext cx="1627200" cy="2697120"/>
+            <a:ext cx="1626840" cy="2696760"/>
           </a:xfrm>
           <a:prstGeom prst="rect">
             <a:avLst/>
@@ -18592,6 +19184,11 @@
             <a:noAutofit/>
           </a:bodyPr>
           <a:p>
+            <a:pPr>
+              <a:lnSpc>
+                <a:spcPct val="100000"/>
+              </a:lnSpc>
+            </a:pPr>
             <a:endParaRPr b="0" lang="en-US" sz="1800" spc="-1" strike="noStrike">
               <a:solidFill>
                 <a:srgbClr val="ffffff"/>
@@ -18610,7 +19207,7 @@
         <p:spPr>
           <a:xfrm>
             <a:off x="255960" y="1170360"/>
-            <a:ext cx="1627200" cy="456840"/>
+            <a:ext cx="1626840" cy="456480"/>
           </a:xfrm>
           <a:prstGeom prst="rect">
             <a:avLst/>
@@ -18636,6 +19233,11 @@
             <a:noAutofit/>
           </a:bodyPr>
           <a:p>
+            <a:pPr>
+              <a:lnSpc>
+                <a:spcPct val="100000"/>
+              </a:lnSpc>
+            </a:pPr>
             <a:endParaRPr b="0" lang="en-US" sz="1800" spc="-1" strike="noStrike">
               <a:solidFill>
                 <a:srgbClr val="ffffff"/>
@@ -18654,7 +19256,7 @@
         <p:spPr>
           <a:xfrm>
             <a:off x="255960" y="1170360"/>
-            <a:ext cx="411120" cy="456840"/>
+            <a:ext cx="410760" cy="456480"/>
           </a:xfrm>
           <a:prstGeom prst="rect">
             <a:avLst/>
@@ -18710,7 +19312,7 @@
         <p:spPr>
           <a:xfrm>
             <a:off x="667440" y="1170360"/>
-            <a:ext cx="1188360" cy="456840"/>
+            <a:ext cx="1188000" cy="456480"/>
           </a:xfrm>
           <a:prstGeom prst="rect">
             <a:avLst/>
@@ -18766,7 +19368,7 @@
         <p:spPr>
           <a:xfrm>
             <a:off x="329040" y="1664280"/>
-            <a:ext cx="1481040" cy="456840"/>
+            <a:ext cx="1480680" cy="456480"/>
           </a:xfrm>
           <a:prstGeom prst="rect">
             <a:avLst/>
@@ -18849,7 +19451,7 @@
         <p:spPr>
           <a:xfrm>
             <a:off x="347400" y="2157840"/>
-            <a:ext cx="1444320" cy="1627200"/>
+            <a:ext cx="1443960" cy="1626840"/>
           </a:xfrm>
           <a:prstGeom prst="rect">
             <a:avLst/>
@@ -18906,7 +19508,7 @@
         <p:spPr>
           <a:xfrm>
             <a:off x="1883520" y="1554480"/>
-            <a:ext cx="109440" cy="292320"/>
+            <a:ext cx="109080" cy="291960"/>
           </a:xfrm>
           <a:prstGeom prst="rect">
             <a:avLst/>
@@ -18932,6 +19534,11 @@
             <a:noAutofit/>
           </a:bodyPr>
           <a:p>
+            <a:pPr>
+              <a:lnSpc>
+                <a:spcPct val="100000"/>
+              </a:lnSpc>
+            </a:pPr>
             <a:endParaRPr b="0" lang="en-US" sz="1800" spc="-1" strike="noStrike">
               <a:solidFill>
                 <a:srgbClr val="000000"/>
@@ -18950,7 +19557,7 @@
         <p:spPr>
           <a:xfrm>
             <a:off x="1993320" y="1170360"/>
-            <a:ext cx="1627200" cy="2697120"/>
+            <a:ext cx="1626840" cy="2696760"/>
           </a:xfrm>
           <a:prstGeom prst="rect">
             <a:avLst/>
@@ -18983,6 +19590,11 @@
             <a:noAutofit/>
           </a:bodyPr>
           <a:p>
+            <a:pPr>
+              <a:lnSpc>
+                <a:spcPct val="100000"/>
+              </a:lnSpc>
+            </a:pPr>
             <a:endParaRPr b="0" lang="en-US" sz="1800" spc="-1" strike="noStrike">
               <a:solidFill>
                 <a:srgbClr val="ffffff"/>
@@ -19001,7 +19613,7 @@
         <p:spPr>
           <a:xfrm>
             <a:off x="1993320" y="1170360"/>
-            <a:ext cx="1627200" cy="456840"/>
+            <a:ext cx="1626840" cy="456480"/>
           </a:xfrm>
           <a:prstGeom prst="rect">
             <a:avLst/>
@@ -19027,6 +19639,11 @@
             <a:noAutofit/>
           </a:bodyPr>
           <a:p>
+            <a:pPr>
+              <a:lnSpc>
+                <a:spcPct val="100000"/>
+              </a:lnSpc>
+            </a:pPr>
             <a:endParaRPr b="0" lang="en-US" sz="1800" spc="-1" strike="noStrike">
               <a:solidFill>
                 <a:srgbClr val="ffffff"/>
@@ -19045,7 +19662,7 @@
         <p:spPr>
           <a:xfrm>
             <a:off x="1993320" y="1170360"/>
-            <a:ext cx="411120" cy="456840"/>
+            <a:ext cx="410760" cy="456480"/>
           </a:xfrm>
           <a:prstGeom prst="rect">
             <a:avLst/>
@@ -19101,7 +19718,7 @@
         <p:spPr>
           <a:xfrm>
             <a:off x="2404800" y="1170360"/>
-            <a:ext cx="1188360" cy="456840"/>
+            <a:ext cx="1188000" cy="456480"/>
           </a:xfrm>
           <a:prstGeom prst="rect">
             <a:avLst/>
@@ -19157,7 +19774,7 @@
         <p:spPr>
           <a:xfrm>
             <a:off x="2066400" y="1664280"/>
-            <a:ext cx="1481040" cy="456840"/>
+            <a:ext cx="1480680" cy="456480"/>
           </a:xfrm>
           <a:prstGeom prst="rect">
             <a:avLst/>
@@ -19240,7 +19857,7 @@
         <p:spPr>
           <a:xfrm>
             <a:off x="2084760" y="2157840"/>
-            <a:ext cx="1444320" cy="1627200"/>
+            <a:ext cx="1443960" cy="1626840"/>
           </a:xfrm>
           <a:prstGeom prst="rect">
             <a:avLst/>
@@ -19297,7 +19914,7 @@
         <p:spPr>
           <a:xfrm>
             <a:off x="3620880" y="1554480"/>
-            <a:ext cx="109440" cy="292320"/>
+            <a:ext cx="109080" cy="291960"/>
           </a:xfrm>
           <a:prstGeom prst="rect">
             <a:avLst/>
@@ -19323,6 +19940,11 @@
             <a:noAutofit/>
           </a:bodyPr>
           <a:p>
+            <a:pPr>
+              <a:lnSpc>
+                <a:spcPct val="100000"/>
+              </a:lnSpc>
+            </a:pPr>
             <a:endParaRPr b="0" lang="en-US" sz="1800" spc="-1" strike="noStrike">
               <a:solidFill>
                 <a:srgbClr val="000000"/>
@@ -19341,7 +19963,7 @@
         <p:spPr>
           <a:xfrm>
             <a:off x="3730680" y="1170360"/>
-            <a:ext cx="1627200" cy="2697120"/>
+            <a:ext cx="1626840" cy="2696760"/>
           </a:xfrm>
           <a:prstGeom prst="rect">
             <a:avLst/>
@@ -19374,6 +19996,11 @@
             <a:noAutofit/>
           </a:bodyPr>
           <a:p>
+            <a:pPr>
+              <a:lnSpc>
+                <a:spcPct val="100000"/>
+              </a:lnSpc>
+            </a:pPr>
             <a:endParaRPr b="0" lang="en-US" sz="1800" spc="-1" strike="noStrike">
               <a:solidFill>
                 <a:srgbClr val="ffffff"/>
@@ -19392,7 +20019,7 @@
         <p:spPr>
           <a:xfrm>
             <a:off x="3730680" y="1170360"/>
-            <a:ext cx="1627200" cy="456840"/>
+            <a:ext cx="1626840" cy="456480"/>
           </a:xfrm>
           <a:prstGeom prst="rect">
             <a:avLst/>
@@ -19418,6 +20045,11 @@
             <a:noAutofit/>
           </a:bodyPr>
           <a:p>
+            <a:pPr>
+              <a:lnSpc>
+                <a:spcPct val="100000"/>
+              </a:lnSpc>
+            </a:pPr>
             <a:endParaRPr b="0" lang="en-US" sz="1800" spc="-1" strike="noStrike">
               <a:solidFill>
                 <a:srgbClr val="ffffff"/>
@@ -19436,7 +20068,7 @@
         <p:spPr>
           <a:xfrm>
             <a:off x="3730680" y="1170360"/>
-            <a:ext cx="411120" cy="456840"/>
+            <a:ext cx="410760" cy="456480"/>
           </a:xfrm>
           <a:prstGeom prst="rect">
             <a:avLst/>
@@ -19492,7 +20124,7 @@
         <p:spPr>
           <a:xfrm>
             <a:off x="4142160" y="1170360"/>
-            <a:ext cx="1188360" cy="456840"/>
+            <a:ext cx="1188000" cy="456480"/>
           </a:xfrm>
           <a:prstGeom prst="rect">
             <a:avLst/>
@@ -19548,7 +20180,7 @@
         <p:spPr>
           <a:xfrm>
             <a:off x="3803760" y="1664280"/>
-            <a:ext cx="1481040" cy="456840"/>
+            <a:ext cx="1480680" cy="456480"/>
           </a:xfrm>
           <a:prstGeom prst="rect">
             <a:avLst/>
@@ -19631,7 +20263,7 @@
         <p:spPr>
           <a:xfrm>
             <a:off x="3822120" y="2157840"/>
-            <a:ext cx="1444320" cy="1627200"/>
+            <a:ext cx="1443960" cy="1626840"/>
           </a:xfrm>
           <a:prstGeom prst="rect">
             <a:avLst/>
@@ -19688,7 +20320,7 @@
         <p:spPr>
           <a:xfrm>
             <a:off x="5358240" y="1554480"/>
-            <a:ext cx="109440" cy="292320"/>
+            <a:ext cx="109080" cy="291960"/>
           </a:xfrm>
           <a:prstGeom prst="rect">
             <a:avLst/>
@@ -19714,6 +20346,11 @@
             <a:noAutofit/>
           </a:bodyPr>
           <a:p>
+            <a:pPr>
+              <a:lnSpc>
+                <a:spcPct val="100000"/>
+              </a:lnSpc>
+            </a:pPr>
             <a:endParaRPr b="0" lang="en-US" sz="1800" spc="-1" strike="noStrike">
               <a:solidFill>
                 <a:srgbClr val="000000"/>
@@ -19732,7 +20369,7 @@
         <p:spPr>
           <a:xfrm>
             <a:off x="5468040" y="1170360"/>
-            <a:ext cx="1627200" cy="2697120"/>
+            <a:ext cx="1626840" cy="2696760"/>
           </a:xfrm>
           <a:prstGeom prst="rect">
             <a:avLst/>
@@ -19765,6 +20402,11 @@
             <a:noAutofit/>
           </a:bodyPr>
           <a:p>
+            <a:pPr>
+              <a:lnSpc>
+                <a:spcPct val="100000"/>
+              </a:lnSpc>
+            </a:pPr>
             <a:endParaRPr b="0" lang="en-US" sz="1800" spc="-1" strike="noStrike">
               <a:solidFill>
                 <a:srgbClr val="ffffff"/>
@@ -19783,7 +20425,7 @@
         <p:spPr>
           <a:xfrm>
             <a:off x="5468040" y="1170360"/>
-            <a:ext cx="1627200" cy="456840"/>
+            <a:ext cx="1626840" cy="456480"/>
           </a:xfrm>
           <a:prstGeom prst="rect">
             <a:avLst/>
@@ -19809,6 +20451,11 @@
             <a:noAutofit/>
           </a:bodyPr>
           <a:p>
+            <a:pPr>
+              <a:lnSpc>
+                <a:spcPct val="100000"/>
+              </a:lnSpc>
+            </a:pPr>
             <a:endParaRPr b="0" lang="en-US" sz="1800" spc="-1" strike="noStrike">
               <a:solidFill>
                 <a:srgbClr val="ffffff"/>
@@ -19827,7 +20474,7 @@
         <p:spPr>
           <a:xfrm>
             <a:off x="5468040" y="1170360"/>
-            <a:ext cx="411120" cy="456840"/>
+            <a:ext cx="410760" cy="456480"/>
           </a:xfrm>
           <a:prstGeom prst="rect">
             <a:avLst/>
@@ -19883,7 +20530,7 @@
         <p:spPr>
           <a:xfrm>
             <a:off x="5879520" y="1170360"/>
-            <a:ext cx="1188360" cy="456840"/>
+            <a:ext cx="1188000" cy="456480"/>
           </a:xfrm>
           <a:prstGeom prst="rect">
             <a:avLst/>
@@ -19939,7 +20586,7 @@
         <p:spPr>
           <a:xfrm>
             <a:off x="5541120" y="1664280"/>
-            <a:ext cx="1481040" cy="456840"/>
+            <a:ext cx="1480680" cy="456480"/>
           </a:xfrm>
           <a:prstGeom prst="rect">
             <a:avLst/>
@@ -20022,7 +20669,7 @@
         <p:spPr>
           <a:xfrm>
             <a:off x="5559480" y="2157840"/>
-            <a:ext cx="1444320" cy="1627200"/>
+            <a:ext cx="1443960" cy="1626840"/>
           </a:xfrm>
           <a:prstGeom prst="rect">
             <a:avLst/>
@@ -20079,7 +20726,7 @@
         <p:spPr>
           <a:xfrm>
             <a:off x="7095600" y="1554480"/>
-            <a:ext cx="109440" cy="292320"/>
+            <a:ext cx="109080" cy="291960"/>
           </a:xfrm>
           <a:prstGeom prst="rect">
             <a:avLst/>
@@ -20105,6 +20752,11 @@
             <a:noAutofit/>
           </a:bodyPr>
           <a:p>
+            <a:pPr>
+              <a:lnSpc>
+                <a:spcPct val="100000"/>
+              </a:lnSpc>
+            </a:pPr>
             <a:endParaRPr b="0" lang="en-US" sz="1800" spc="-1" strike="noStrike">
               <a:solidFill>
                 <a:srgbClr val="000000"/>
@@ -20123,7 +20775,7 @@
         <p:spPr>
           <a:xfrm>
             <a:off x="7205400" y="1170360"/>
-            <a:ext cx="1627200" cy="2697120"/>
+            <a:ext cx="1626840" cy="2696760"/>
           </a:xfrm>
           <a:prstGeom prst="rect">
             <a:avLst/>
@@ -20156,6 +20808,11 @@
             <a:noAutofit/>
           </a:bodyPr>
           <a:p>
+            <a:pPr>
+              <a:lnSpc>
+                <a:spcPct val="100000"/>
+              </a:lnSpc>
+            </a:pPr>
             <a:endParaRPr b="0" lang="en-US" sz="1800" spc="-1" strike="noStrike">
               <a:solidFill>
                 <a:srgbClr val="ffffff"/>
@@ -20174,7 +20831,7 @@
         <p:spPr>
           <a:xfrm>
             <a:off x="7205400" y="1170360"/>
-            <a:ext cx="1627200" cy="456840"/>
+            <a:ext cx="1626840" cy="456480"/>
           </a:xfrm>
           <a:prstGeom prst="rect">
             <a:avLst/>
@@ -20200,6 +20857,11 @@
             <a:noAutofit/>
           </a:bodyPr>
           <a:p>
+            <a:pPr>
+              <a:lnSpc>
+                <a:spcPct val="100000"/>
+              </a:lnSpc>
+            </a:pPr>
             <a:endParaRPr b="0" lang="en-US" sz="1800" spc="-1" strike="noStrike">
               <a:solidFill>
                 <a:srgbClr val="ffffff"/>
@@ -20218,7 +20880,7 @@
         <p:spPr>
           <a:xfrm>
             <a:off x="7205400" y="1170360"/>
-            <a:ext cx="411120" cy="456840"/>
+            <a:ext cx="410760" cy="456480"/>
           </a:xfrm>
           <a:prstGeom prst="rect">
             <a:avLst/>
@@ -20274,7 +20936,7 @@
         <p:spPr>
           <a:xfrm>
             <a:off x="7616880" y="1170360"/>
-            <a:ext cx="1188360" cy="456840"/>
+            <a:ext cx="1188000" cy="456480"/>
           </a:xfrm>
           <a:prstGeom prst="rect">
             <a:avLst/>
@@ -20330,7 +20992,7 @@
         <p:spPr>
           <a:xfrm>
             <a:off x="7278480" y="1664280"/>
-            <a:ext cx="1481040" cy="456840"/>
+            <a:ext cx="1480680" cy="456480"/>
           </a:xfrm>
           <a:prstGeom prst="rect">
             <a:avLst/>
@@ -20413,7 +21075,7 @@
         <p:spPr>
           <a:xfrm>
             <a:off x="7296840" y="2157840"/>
-            <a:ext cx="1444320" cy="1627200"/>
+            <a:ext cx="1443960" cy="1626840"/>
           </a:xfrm>
           <a:prstGeom prst="rect">
             <a:avLst/>
@@ -20470,7 +21132,7 @@
         <p:spPr>
           <a:xfrm>
             <a:off x="255960" y="3986640"/>
-            <a:ext cx="8631720" cy="1005480"/>
+            <a:ext cx="8631360" cy="1005120"/>
           </a:xfrm>
           <a:prstGeom prst="rect">
             <a:avLst/>
@@ -20503,6 +21165,11 @@
             <a:noAutofit/>
           </a:bodyPr>
           <a:p>
+            <a:pPr>
+              <a:lnSpc>
+                <a:spcPct val="100000"/>
+              </a:lnSpc>
+            </a:pPr>
             <a:endParaRPr b="0" lang="en-US" sz="1800" spc="-1" strike="noStrike">
               <a:solidFill>
                 <a:srgbClr val="ffffff"/>
@@ -20521,7 +21188,7 @@
         <p:spPr>
           <a:xfrm>
             <a:off x="384120" y="4005000"/>
-            <a:ext cx="8229240" cy="310680"/>
+            <a:ext cx="8228880" cy="310320"/>
           </a:xfrm>
           <a:prstGeom prst="rect">
             <a:avLst/>
@@ -20578,7 +21245,7 @@
         <p:spPr>
           <a:xfrm>
             <a:off x="347400" y="4370760"/>
-            <a:ext cx="1316520" cy="475200"/>
+            <a:ext cx="1316160" cy="474840"/>
           </a:xfrm>
           <a:prstGeom prst="rect">
             <a:avLst/>
@@ -20604,6 +21271,11 @@
             <a:noAutofit/>
           </a:bodyPr>
           <a:p>
+            <a:pPr>
+              <a:lnSpc>
+                <a:spcPct val="100000"/>
+              </a:lnSpc>
+            </a:pPr>
             <a:endParaRPr b="0" lang="en-US" sz="1800" spc="-1" strike="noStrike">
               <a:solidFill>
                 <a:srgbClr val="ffffff"/>
@@ -20622,7 +21294,7 @@
         <p:spPr>
           <a:xfrm>
             <a:off x="347400" y="4370760"/>
-            <a:ext cx="1316520" cy="475200"/>
+            <a:ext cx="1316160" cy="474840"/>
           </a:xfrm>
           <a:prstGeom prst="rect">
             <a:avLst/>
@@ -20679,7 +21351,7 @@
         <p:spPr>
           <a:xfrm>
             <a:off x="1783080" y="4370760"/>
-            <a:ext cx="1316520" cy="475200"/>
+            <a:ext cx="1316160" cy="474840"/>
           </a:xfrm>
           <a:prstGeom prst="rect">
             <a:avLst/>
@@ -20705,6 +21377,11 @@
             <a:noAutofit/>
           </a:bodyPr>
           <a:p>
+            <a:pPr>
+              <a:lnSpc>
+                <a:spcPct val="100000"/>
+              </a:lnSpc>
+            </a:pPr>
             <a:endParaRPr b="0" lang="en-US" sz="1800" spc="-1" strike="noStrike">
               <a:solidFill>
                 <a:srgbClr val="ffffff"/>
@@ -20723,7 +21400,7 @@
         <p:spPr>
           <a:xfrm>
             <a:off x="1783080" y="4370760"/>
-            <a:ext cx="1316520" cy="475200"/>
+            <a:ext cx="1316160" cy="474840"/>
           </a:xfrm>
           <a:prstGeom prst="rect">
             <a:avLst/>
@@ -20780,7 +21457,7 @@
         <p:spPr>
           <a:xfrm>
             <a:off x="3218760" y="4370760"/>
-            <a:ext cx="1316520" cy="475200"/>
+            <a:ext cx="1316160" cy="474840"/>
           </a:xfrm>
           <a:prstGeom prst="rect">
             <a:avLst/>
@@ -20806,6 +21483,11 @@
             <a:noAutofit/>
           </a:bodyPr>
           <a:p>
+            <a:pPr>
+              <a:lnSpc>
+                <a:spcPct val="100000"/>
+              </a:lnSpc>
+            </a:pPr>
             <a:endParaRPr b="0" lang="en-US" sz="1800" spc="-1" strike="noStrike">
               <a:solidFill>
                 <a:srgbClr val="ffffff"/>
@@ -20824,7 +21506,7 @@
         <p:spPr>
           <a:xfrm>
             <a:off x="3218760" y="4370760"/>
-            <a:ext cx="1316520" cy="475200"/>
+            <a:ext cx="1316160" cy="474840"/>
           </a:xfrm>
           <a:prstGeom prst="rect">
             <a:avLst/>
@@ -20881,7 +21563,7 @@
         <p:spPr>
           <a:xfrm>
             <a:off x="4654440" y="4370760"/>
-            <a:ext cx="1316520" cy="475200"/>
+            <a:ext cx="1316160" cy="474840"/>
           </a:xfrm>
           <a:prstGeom prst="rect">
             <a:avLst/>
@@ -20907,6 +21589,11 @@
             <a:noAutofit/>
           </a:bodyPr>
           <a:p>
+            <a:pPr>
+              <a:lnSpc>
+                <a:spcPct val="100000"/>
+              </a:lnSpc>
+            </a:pPr>
             <a:endParaRPr b="0" lang="en-US" sz="1800" spc="-1" strike="noStrike">
               <a:solidFill>
                 <a:srgbClr val="ffffff"/>
@@ -20925,7 +21612,7 @@
         <p:spPr>
           <a:xfrm>
             <a:off x="4654440" y="4370760"/>
-            <a:ext cx="1316520" cy="475200"/>
+            <a:ext cx="1316160" cy="474840"/>
           </a:xfrm>
           <a:prstGeom prst="rect">
             <a:avLst/>
@@ -20982,7 +21669,7 @@
         <p:spPr>
           <a:xfrm>
             <a:off x="6089760" y="4370760"/>
-            <a:ext cx="1316520" cy="475200"/>
+            <a:ext cx="1316160" cy="474840"/>
           </a:xfrm>
           <a:prstGeom prst="rect">
             <a:avLst/>
@@ -21008,6 +21695,11 @@
             <a:noAutofit/>
           </a:bodyPr>
           <a:p>
+            <a:pPr>
+              <a:lnSpc>
+                <a:spcPct val="100000"/>
+              </a:lnSpc>
+            </a:pPr>
             <a:endParaRPr b="0" lang="en-US" sz="1800" spc="-1" strike="noStrike">
               <a:solidFill>
                 <a:srgbClr val="ffffff"/>
@@ -21026,7 +21718,7 @@
         <p:spPr>
           <a:xfrm>
             <a:off x="6089760" y="4370760"/>
-            <a:ext cx="1316520" cy="475200"/>
+            <a:ext cx="1316160" cy="474840"/>
           </a:xfrm>
           <a:prstGeom prst="rect">
             <a:avLst/>
@@ -21083,7 +21775,7 @@
         <p:spPr>
           <a:xfrm>
             <a:off x="7525440" y="4370760"/>
-            <a:ext cx="1316520" cy="475200"/>
+            <a:ext cx="1316160" cy="474840"/>
           </a:xfrm>
           <a:prstGeom prst="rect">
             <a:avLst/>
@@ -21109,6 +21801,11 @@
             <a:noAutofit/>
           </a:bodyPr>
           <a:p>
+            <a:pPr>
+              <a:lnSpc>
+                <a:spcPct val="100000"/>
+              </a:lnSpc>
+            </a:pPr>
             <a:endParaRPr b="0" lang="en-US" sz="1800" spc="-1" strike="noStrike">
               <a:solidFill>
                 <a:srgbClr val="ffffff"/>
@@ -21127,7 +21824,7 @@
         <p:spPr>
           <a:xfrm>
             <a:off x="7525440" y="4370760"/>
-            <a:ext cx="1316520" cy="475200"/>
+            <a:ext cx="1316160" cy="474840"/>
           </a:xfrm>
           <a:prstGeom prst="rect">
             <a:avLst/>
@@ -22492,7 +23189,7 @@
         <p:spPr>
           <a:xfrm>
             <a:off x="6217920" y="-1280160"/>
-            <a:ext cx="5028840" cy="5028840"/>
+            <a:ext cx="5028480" cy="5028480"/>
           </a:xfrm>
           <a:prstGeom prst="ellipse">
             <a:avLst/>
@@ -22518,6 +23215,11 @@
             <a:noAutofit/>
           </a:bodyPr>
           <a:p>
+            <a:pPr>
+              <a:lnSpc>
+                <a:spcPct val="100000"/>
+              </a:lnSpc>
+            </a:pPr>
             <a:endParaRPr b="0" lang="en-US" sz="1800" spc="-1" strike="noStrike">
               <a:solidFill>
                 <a:srgbClr val="ffffff"/>
@@ -22536,7 +23238,7 @@
         <p:spPr>
           <a:xfrm>
             <a:off x="-1371600" y="3200400"/>
-            <a:ext cx="4114440" cy="4114440"/>
+            <a:ext cx="4114080" cy="4114080"/>
           </a:xfrm>
           <a:prstGeom prst="ellipse">
             <a:avLst/>
@@ -22566,6 +23268,11 @@
             <a:noAutofit/>
           </a:bodyPr>
           <a:p>
+            <a:pPr>
+              <a:lnSpc>
+                <a:spcPct val="100000"/>
+              </a:lnSpc>
+            </a:pPr>
             <a:endParaRPr b="0" lang="en-US" sz="1800" spc="-1" strike="noStrike">
               <a:solidFill>
                 <a:srgbClr val="ffffff"/>
@@ -22584,7 +23291,7 @@
         <p:spPr>
           <a:xfrm>
             <a:off x="0" y="0"/>
-            <a:ext cx="200880" cy="5143320"/>
+            <a:ext cx="200520" cy="5142960"/>
           </a:xfrm>
           <a:prstGeom prst="rect">
             <a:avLst/>
@@ -22610,6 +23317,11 @@
             <a:noAutofit/>
           </a:bodyPr>
           <a:p>
+            <a:pPr>
+              <a:lnSpc>
+                <a:spcPct val="100000"/>
+              </a:lnSpc>
+            </a:pPr>
             <a:endParaRPr b="0" lang="en-US" sz="1800" spc="-1" strike="noStrike">
               <a:solidFill>
                 <a:srgbClr val="000000"/>
@@ -22628,7 +23340,7 @@
         <p:spPr>
           <a:xfrm>
             <a:off x="457200" y="274320"/>
-            <a:ext cx="8229240" cy="594000"/>
+            <a:ext cx="8228880" cy="593640"/>
           </a:xfrm>
           <a:prstGeom prst="rect">
             <a:avLst/>
@@ -22685,7 +23397,7 @@
         <p:spPr>
           <a:xfrm>
             <a:off x="457200" y="877680"/>
-            <a:ext cx="6400440" cy="273960"/>
+            <a:ext cx="6400080" cy="273600"/>
           </a:xfrm>
           <a:prstGeom prst="rect">
             <a:avLst/>
@@ -22741,7 +23453,7 @@
         <p:spPr>
           <a:xfrm>
             <a:off x="457200" y="1353240"/>
-            <a:ext cx="328680" cy="328680"/>
+            <a:ext cx="328320" cy="328320"/>
           </a:xfrm>
           <a:prstGeom prst="ellipse">
             <a:avLst/>
@@ -22767,6 +23479,11 @@
             <a:noAutofit/>
           </a:bodyPr>
           <a:p>
+            <a:pPr>
+              <a:lnSpc>
+                <a:spcPct val="100000"/>
+              </a:lnSpc>
+            </a:pPr>
             <a:endParaRPr b="0" lang="en-US" sz="1800" spc="-1" strike="noStrike">
               <a:solidFill>
                 <a:srgbClr val="ffffff"/>
@@ -22785,7 +23502,7 @@
         <p:spPr>
           <a:xfrm>
             <a:off x="457200" y="1353240"/>
-            <a:ext cx="328680" cy="328680"/>
+            <a:ext cx="328320" cy="328320"/>
           </a:xfrm>
           <a:prstGeom prst="rect">
             <a:avLst/>
@@ -22841,7 +23558,7 @@
         <p:spPr>
           <a:xfrm>
             <a:off x="932760" y="1280160"/>
-            <a:ext cx="7817760" cy="502560"/>
+            <a:ext cx="7817400" cy="502200"/>
           </a:xfrm>
           <a:prstGeom prst="rect">
             <a:avLst/>
@@ -22898,7 +23615,7 @@
         <p:spPr>
           <a:xfrm>
             <a:off x="457200" y="1920240"/>
-            <a:ext cx="328680" cy="328680"/>
+            <a:ext cx="328320" cy="328320"/>
           </a:xfrm>
           <a:prstGeom prst="ellipse">
             <a:avLst/>
@@ -22924,6 +23641,11 @@
             <a:noAutofit/>
           </a:bodyPr>
           <a:p>
+            <a:pPr>
+              <a:lnSpc>
+                <a:spcPct val="100000"/>
+              </a:lnSpc>
+            </a:pPr>
             <a:endParaRPr b="0" lang="en-US" sz="1800" spc="-1" strike="noStrike">
               <a:solidFill>
                 <a:srgbClr val="ffffff"/>
@@ -22942,7 +23664,7 @@
         <p:spPr>
           <a:xfrm>
             <a:off x="457200" y="1920240"/>
-            <a:ext cx="328680" cy="328680"/>
+            <a:ext cx="328320" cy="328320"/>
           </a:xfrm>
           <a:prstGeom prst="rect">
             <a:avLst/>
@@ -22998,7 +23720,7 @@
         <p:spPr>
           <a:xfrm>
             <a:off x="932760" y="1847160"/>
-            <a:ext cx="7817760" cy="502560"/>
+            <a:ext cx="7817400" cy="502200"/>
           </a:xfrm>
           <a:prstGeom prst="rect">
             <a:avLst/>
@@ -23055,7 +23777,7 @@
         <p:spPr>
           <a:xfrm>
             <a:off x="457200" y="2487240"/>
-            <a:ext cx="328680" cy="328680"/>
+            <a:ext cx="328320" cy="328320"/>
           </a:xfrm>
           <a:prstGeom prst="ellipse">
             <a:avLst/>
@@ -23081,6 +23803,11 @@
             <a:noAutofit/>
           </a:bodyPr>
           <a:p>
+            <a:pPr>
+              <a:lnSpc>
+                <a:spcPct val="100000"/>
+              </a:lnSpc>
+            </a:pPr>
             <a:endParaRPr b="0" lang="en-US" sz="1800" spc="-1" strike="noStrike">
               <a:solidFill>
                 <a:srgbClr val="ffffff"/>
@@ -23099,7 +23826,7 @@
         <p:spPr>
           <a:xfrm>
             <a:off x="457200" y="2487240"/>
-            <a:ext cx="328680" cy="328680"/>
+            <a:ext cx="328320" cy="328320"/>
           </a:xfrm>
           <a:prstGeom prst="rect">
             <a:avLst/>
@@ -23155,7 +23882,7 @@
         <p:spPr>
           <a:xfrm>
             <a:off x="932760" y="2414160"/>
-            <a:ext cx="7817760" cy="502560"/>
+            <a:ext cx="7817400" cy="502200"/>
           </a:xfrm>
           <a:prstGeom prst="rect">
             <a:avLst/>
@@ -23212,7 +23939,7 @@
         <p:spPr>
           <a:xfrm>
             <a:off x="457200" y="3054240"/>
-            <a:ext cx="328680" cy="328680"/>
+            <a:ext cx="328320" cy="328320"/>
           </a:xfrm>
           <a:prstGeom prst="ellipse">
             <a:avLst/>
@@ -23238,6 +23965,11 @@
             <a:noAutofit/>
           </a:bodyPr>
           <a:p>
+            <a:pPr>
+              <a:lnSpc>
+                <a:spcPct val="100000"/>
+              </a:lnSpc>
+            </a:pPr>
             <a:endParaRPr b="0" lang="en-US" sz="1800" spc="-1" strike="noStrike">
               <a:solidFill>
                 <a:srgbClr val="ffffff"/>
@@ -23256,7 +23988,7 @@
         <p:spPr>
           <a:xfrm>
             <a:off x="457200" y="3054240"/>
-            <a:ext cx="328680" cy="328680"/>
+            <a:ext cx="328320" cy="328320"/>
           </a:xfrm>
           <a:prstGeom prst="rect">
             <a:avLst/>
@@ -23312,7 +24044,7 @@
         <p:spPr>
           <a:xfrm>
             <a:off x="932760" y="2980800"/>
-            <a:ext cx="7817760" cy="502560"/>
+            <a:ext cx="7817400" cy="502200"/>
           </a:xfrm>
           <a:prstGeom prst="rect">
             <a:avLst/>
@@ -23369,7 +24101,7 @@
         <p:spPr>
           <a:xfrm>
             <a:off x="457200" y="3620880"/>
-            <a:ext cx="328680" cy="328680"/>
+            <a:ext cx="328320" cy="328320"/>
           </a:xfrm>
           <a:prstGeom prst="ellipse">
             <a:avLst/>
@@ -23395,6 +24127,11 @@
             <a:noAutofit/>
           </a:bodyPr>
           <a:p>
+            <a:pPr>
+              <a:lnSpc>
+                <a:spcPct val="100000"/>
+              </a:lnSpc>
+            </a:pPr>
             <a:endParaRPr b="0" lang="en-US" sz="1800" spc="-1" strike="noStrike">
               <a:solidFill>
                 <a:srgbClr val="ffffff"/>
@@ -23413,7 +24150,7 @@
         <p:spPr>
           <a:xfrm>
             <a:off x="457200" y="3620880"/>
-            <a:ext cx="328680" cy="328680"/>
+            <a:ext cx="328320" cy="328320"/>
           </a:xfrm>
           <a:prstGeom prst="rect">
             <a:avLst/>
@@ -23469,7 +24206,7 @@
         <p:spPr>
           <a:xfrm>
             <a:off x="932760" y="3547800"/>
-            <a:ext cx="7817760" cy="502560"/>
+            <a:ext cx="7817400" cy="502200"/>
           </a:xfrm>
           <a:prstGeom prst="rect">
             <a:avLst/>
@@ -23526,7 +24263,7 @@
         <p:spPr>
           <a:xfrm>
             <a:off x="457200" y="4187880"/>
-            <a:ext cx="328680" cy="328680"/>
+            <a:ext cx="328320" cy="328320"/>
           </a:xfrm>
           <a:prstGeom prst="ellipse">
             <a:avLst/>
@@ -23552,6 +24289,11 @@
             <a:noAutofit/>
           </a:bodyPr>
           <a:p>
+            <a:pPr>
+              <a:lnSpc>
+                <a:spcPct val="100000"/>
+              </a:lnSpc>
+            </a:pPr>
             <a:endParaRPr b="0" lang="en-US" sz="1800" spc="-1" strike="noStrike">
               <a:solidFill>
                 <a:srgbClr val="000000"/>
@@ -23570,7 +24312,7 @@
         <p:spPr>
           <a:xfrm>
             <a:off x="457200" y="4187880"/>
-            <a:ext cx="328680" cy="328680"/>
+            <a:ext cx="328320" cy="328320"/>
           </a:xfrm>
           <a:prstGeom prst="rect">
             <a:avLst/>
@@ -23626,7 +24368,7 @@
         <p:spPr>
           <a:xfrm>
             <a:off x="932760" y="4114800"/>
-            <a:ext cx="7817760" cy="502560"/>
+            <a:ext cx="7817400" cy="502200"/>
           </a:xfrm>
           <a:prstGeom prst="rect">
             <a:avLst/>
@@ -23683,7 +24425,7 @@
         <p:spPr>
           <a:xfrm>
             <a:off x="457200" y="4663440"/>
-            <a:ext cx="8320680" cy="383760"/>
+            <a:ext cx="8320320" cy="383400"/>
           </a:xfrm>
           <a:prstGeom prst="rect">
             <a:avLst/>
@@ -23709,6 +24451,11 @@
             <a:noAutofit/>
           </a:bodyPr>
           <a:p>
+            <a:pPr>
+              <a:lnSpc>
+                <a:spcPct val="100000"/>
+              </a:lnSpc>
+            </a:pPr>
             <a:endParaRPr b="0" lang="en-US" sz="1800" spc="-1" strike="noStrike">
               <a:solidFill>
                 <a:srgbClr val="ffffff"/>
@@ -23727,7 +24474,7 @@
         <p:spPr>
           <a:xfrm>
             <a:off x="457200" y="4663440"/>
-            <a:ext cx="8320680" cy="383760"/>
+            <a:ext cx="8320320" cy="383400"/>
           </a:xfrm>
           <a:prstGeom prst="rect">
             <a:avLst/>
